--- a/Pregrado/Creatividad y pensamiento innovador/Clases/Sesion 07 - Taller de consolidación y sustentación de la propuesta/Presentacion.pptx
+++ b/Pregrado/Creatividad y pensamiento innovador/Clases/Sesion 07 - Taller de consolidación y sustentación de la propuesta/Presentacion.pptx
@@ -25,6 +25,8 @@
     <p:sldId id="273" r:id="rId24"/>
     <p:sldId id="274" r:id="rId25"/>
     <p:sldId id="275" r:id="rId26"/>
+    <p:sldId id="276" r:id="rId27"/>
+    <p:sldId id="277" r:id="rId28"/>
   </p:sldIdLst>
   <p:sldSz cx="12191695" cy="6858000" type="screen4x3"/>
   <p:notesSz cx="6858000" cy="9144000"/>
@@ -5237,7 +5239,7 @@
                 </a:solidFill>
                 <a:latin typeface="Calibri"/>
               </a:rPr>
-              <a:t>TALLER — Sustentación cruzada y consolidación (25 minutos)</a:t>
+              <a:t>TALLER · Sustentación cruzada y consolidación</a:t>
             </a:r>
           </a:p>
         </p:txBody>
@@ -5250,8 +5252,8 @@
         </p:nvSpPr>
         <p:spPr>
           <a:xfrm>
-            <a:off x="640080" y="1691639"/>
-            <a:ext cx="10911535" cy="4617720"/>
+            <a:off x="640080" y="1280160"/>
+            <a:ext cx="10911535" cy="411480"/>
           </a:xfrm>
           <a:prstGeom prst="rect">
             <a:avLst/>
@@ -5264,13 +5266,48 @@
           </a:bodyPr>
           <a:lstStyle/>
           <a:p>
+            <a:pPr algn="ctr"/>
+            <a:r>
+              <a:rPr sz="1500" b="0" i="0">
+                <a:solidFill>
+                  <a:srgbClr val="2B2B2B"/>
+                </a:solidFill>
+                <a:latin typeface="Calibri"/>
+              </a:rPr>
+              <a:t>En ronda, por turnos · el Docente modera y toma el tiempo</a:t>
+            </a:r>
+          </a:p>
+        </p:txBody>
+      </p:sp>
+      <p:sp>
+        <p:nvSpPr>
+          <p:cNvPr id="5" name="TextBox 4"/>
+          <p:cNvSpPr txBox="1"/>
+          <p:nvPr/>
+        </p:nvSpPr>
+        <p:spPr>
+          <a:xfrm>
+            <a:off x="640080" y="2011679"/>
+            <a:ext cx="10911535" cy="4297680"/>
+          </a:xfrm>
+          <a:prstGeom prst="rect">
+            <a:avLst/>
+          </a:prstGeom>
+          <a:noFill/>
+        </p:spPr>
+        <p:txBody>
+          <a:bodyPr wrap="square" anchor="t" lIns="0" rIns="0" tIns="0" bIns="0">
+            <a:spAutoFit/>
+          </a:bodyPr>
+          <a:lstStyle/>
+          <a:p>
             <a:pPr>
               <a:spcAft>
                 <a:spcPts val="1000"/>
               </a:spcAft>
             </a:pPr>
             <a:r>
-              <a:rPr sz="1400" b="0" i="0">
+              <a:rPr sz="1600" b="0" i="0">
                 <a:solidFill>
                   <a:srgbClr val="2B2B2B"/>
                 </a:solidFill>
@@ -5279,56 +5316,22 @@
               <a:t>–   </a:t>
             </a:r>
             <a:r>
-              <a:rPr sz="1400" b="1" i="0">
-                <a:solidFill>
-                  <a:srgbClr val="2B2B2B"/>
-                </a:solidFill>
-                <a:latin typeface="Calibri"/>
-              </a:rPr>
-              <a:t>Paso 1 (12 min) · Ronda de sustentación.</a:t>
-            </a:r>
-            <a:r>
-              <a:rPr sz="1400" b="0" i="0">
-                <a:solidFill>
-                  <a:srgbClr val="2B2B2B"/>
-                </a:solidFill>
-                <a:latin typeface="Calibri"/>
-              </a:rPr>
-              <a:t> Turnos de 3 minutos: pitch de 60 s + dos preguntas + la frase de "qué está listo / qué falta".</a:t>
-            </a:r>
-          </a:p>
-          <a:p>
-            <a:pPr lvl="1">
-              <a:spcAft>
-                <a:spcPts val="600"/>
-              </a:spcAft>
-            </a:pPr>
-            <a:r>
-              <a:rPr sz="1300" b="0" i="0">
-                <a:solidFill>
-                  <a:srgbClr val="2B2B2B"/>
-                </a:solidFill>
-                <a:latin typeface="Calibri"/>
-              </a:rPr>
-              <a:t>●   Quien escucha toma nota con los </a:t>
-            </a:r>
-            <a:r>
-              <a:rPr sz="1300" b="1" i="0">
-                <a:solidFill>
-                  <a:srgbClr val="2B2B2B"/>
-                </a:solidFill>
-                <a:latin typeface="Calibri"/>
-              </a:rPr>
-              <a:t>cuatro criterios de la rúbrica</a:t>
-            </a:r>
-            <a:r>
-              <a:rPr sz="1300" b="0" i="0">
-                <a:solidFill>
-                  <a:srgbClr val="2B2B2B"/>
-                </a:solidFill>
-                <a:latin typeface="Calibri"/>
-              </a:rPr>
-              <a:t>. Una línea por criterio, no más.</a:t>
+              <a:rPr sz="1600" b="1" i="0">
+                <a:solidFill>
+                  <a:srgbClr val="2B2B2B"/>
+                </a:solidFill>
+                <a:latin typeface="Calibri"/>
+              </a:rPr>
+              <a:t>Al final tiene:</a:t>
+            </a:r>
+            <a:r>
+              <a:rPr sz="1600" b="0" i="0">
+                <a:solidFill>
+                  <a:srgbClr val="2B2B2B"/>
+                </a:solidFill>
+                <a:latin typeface="Calibri"/>
+              </a:rPr>
+              <a:t> una lista escrita de ajustes —mínimo tres— y la devolución de un compañero anotada.</a:t>
             </a:r>
           </a:p>
           <a:p>
@@ -5338,7 +5341,7 @@
               </a:spcAft>
             </a:pPr>
             <a:r>
-              <a:rPr sz="1400" b="0" i="0">
+              <a:rPr sz="1600" b="0" i="0">
                 <a:solidFill>
                   <a:srgbClr val="2B2B2B"/>
                 </a:solidFill>
@@ -5347,40 +5350,58 @@
               <a:t>–   </a:t>
             </a:r>
             <a:r>
-              <a:rPr sz="1400" b="1" i="0">
-                <a:solidFill>
-                  <a:srgbClr val="2B2B2B"/>
-                </a:solidFill>
-                <a:latin typeface="Calibri"/>
-              </a:rPr>
-              <a:t>Paso 2 (5 min) · Devolución en pareja.</a:t>
-            </a:r>
-            <a:r>
-              <a:rPr sz="1400" b="0" i="0">
-                <a:solidFill>
-                  <a:srgbClr val="2B2B2B"/>
-                </a:solidFill>
-                <a:latin typeface="Calibri"/>
-              </a:rPr>
-              <a:t> Cada quien le entrega a su compañero las </a:t>
-            </a:r>
-            <a:r>
-              <a:rPr sz="1400" b="1" i="0">
-                <a:solidFill>
-                  <a:srgbClr val="2B2B2B"/>
-                </a:solidFill>
-                <a:latin typeface="Calibri"/>
-              </a:rPr>
-              <a:t>tres frases</a:t>
-            </a:r>
-            <a:r>
-              <a:rPr sz="1400" b="0" i="0">
-                <a:solidFill>
-                  <a:srgbClr val="2B2B2B"/>
-                </a:solidFill>
-                <a:latin typeface="Calibri"/>
-              </a:rPr>
-              <a:t>: me quedó claro / no me quedó claro / le sugiero.</a:t>
+              <a:rPr sz="1600" b="1" i="0">
+                <a:solidFill>
+                  <a:srgbClr val="2B2B2B"/>
+                </a:solidFill>
+                <a:latin typeface="Calibri"/>
+              </a:rPr>
+              <a:t>Paso 1</a:t>
+            </a:r>
+            <a:r>
+              <a:rPr sz="1600" b="0" i="0">
+                <a:solidFill>
+                  <a:srgbClr val="2B2B2B"/>
+                </a:solidFill>
+                <a:latin typeface="Calibri"/>
+              </a:rPr>
+              <a:t> · </a:t>
+            </a:r>
+            <a:r>
+              <a:rPr sz="1600" b="1" i="0">
+                <a:solidFill>
+                  <a:srgbClr val="2B2B2B"/>
+                </a:solidFill>
+                <a:latin typeface="Calibri"/>
+              </a:rPr>
+              <a:t>Ronda de sustentación:</a:t>
+            </a:r>
+            <a:r>
+              <a:rPr sz="1600" b="0" i="0">
+                <a:solidFill>
+                  <a:srgbClr val="2B2B2B"/>
+                </a:solidFill>
+                <a:latin typeface="Calibri"/>
+              </a:rPr>
+              <a:t> pitch de 60 s + dos preguntas + la frase «qué está listo / qué falta». Quien escucha toma nota con los </a:t>
+            </a:r>
+            <a:r>
+              <a:rPr sz="1600" b="1" i="0">
+                <a:solidFill>
+                  <a:srgbClr val="2B2B2B"/>
+                </a:solidFill>
+                <a:latin typeface="Calibri"/>
+              </a:rPr>
+              <a:t>cuatro criterios de la rúbrica</a:t>
+            </a:r>
+            <a:r>
+              <a:rPr sz="1600" b="0" i="0">
+                <a:solidFill>
+                  <a:srgbClr val="2B2B2B"/>
+                </a:solidFill>
+                <a:latin typeface="Calibri"/>
+              </a:rPr>
+              <a:t>, una línea por criterio.</a:t>
             </a:r>
           </a:p>
           <a:p>
@@ -5390,7 +5411,7 @@
               </a:spcAft>
             </a:pPr>
             <a:r>
-              <a:rPr sz="1400" b="0" i="0">
+              <a:rPr sz="1600" b="0" i="0">
                 <a:solidFill>
                   <a:srgbClr val="2B2B2B"/>
                 </a:solidFill>
@@ -5399,74 +5420,58 @@
               <a:t>–   </a:t>
             </a:r>
             <a:r>
-              <a:rPr sz="1400" b="1" i="0">
-                <a:solidFill>
-                  <a:srgbClr val="2B2B2B"/>
-                </a:solidFill>
-                <a:latin typeface="Calibri"/>
-              </a:rPr>
-              <a:t>Paso 3 (6 min) · Revisión de costuras.</a:t>
-            </a:r>
-            <a:r>
-              <a:rPr sz="1400" b="0" i="0">
-                <a:solidFill>
-                  <a:srgbClr val="2B2B2B"/>
-                </a:solidFill>
-                <a:latin typeface="Calibri"/>
-              </a:rPr>
-              <a:t> Con la devolución en la mano, revise las </a:t>
-            </a:r>
-            <a:r>
-              <a:rPr sz="1400" b="1" i="0">
-                <a:solidFill>
-                  <a:srgbClr val="2B2B2B"/>
-                </a:solidFill>
-                <a:latin typeface="Calibri"/>
-              </a:rPr>
-              <a:t>seis costuras</a:t>
-            </a:r>
-            <a:r>
-              <a:rPr sz="1400" b="0" i="0">
-                <a:solidFill>
-                  <a:srgbClr val="2B2B2B"/>
-                </a:solidFill>
-                <a:latin typeface="Calibri"/>
-              </a:rPr>
-              <a:t> de su documento y anote los ajustes en una lista.</a:t>
-            </a:r>
-          </a:p>
-          <a:p>
-            <a:pPr lvl="1">
-              <a:spcAft>
-                <a:spcPts val="600"/>
-              </a:spcAft>
-            </a:pPr>
-            <a:r>
-              <a:rPr sz="1300" b="0" i="0">
-                <a:solidFill>
-                  <a:srgbClr val="2B2B2B"/>
-                </a:solidFill>
-                <a:latin typeface="Calibri"/>
-              </a:rPr>
-              <a:t>●   No los haga ahora: </a:t>
-            </a:r>
-            <a:r>
-              <a:rPr sz="1300" b="1" i="0">
-                <a:solidFill>
-                  <a:srgbClr val="2B2B2B"/>
-                </a:solidFill>
-                <a:latin typeface="Calibri"/>
-              </a:rPr>
-              <a:t>anótelos</a:t>
-            </a:r>
-            <a:r>
-              <a:rPr sz="1300" b="0" i="0">
-                <a:solidFill>
-                  <a:srgbClr val="2B2B2B"/>
-                </a:solidFill>
-                <a:latin typeface="Calibri"/>
-              </a:rPr>
-              <a:t>. Escribir la lista es el producto del taller.</a:t>
+              <a:rPr sz="1600" b="1" i="0">
+                <a:solidFill>
+                  <a:srgbClr val="2B2B2B"/>
+                </a:solidFill>
+                <a:latin typeface="Calibri"/>
+              </a:rPr>
+              <a:t>Paso 2</a:t>
+            </a:r>
+            <a:r>
+              <a:rPr sz="1600" b="0" i="0">
+                <a:solidFill>
+                  <a:srgbClr val="2B2B2B"/>
+                </a:solidFill>
+                <a:latin typeface="Calibri"/>
+              </a:rPr>
+              <a:t> · </a:t>
+            </a:r>
+            <a:r>
+              <a:rPr sz="1600" b="1" i="0">
+                <a:solidFill>
+                  <a:srgbClr val="2B2B2B"/>
+                </a:solidFill>
+                <a:latin typeface="Calibri"/>
+              </a:rPr>
+              <a:t>Devolución en pareja:</a:t>
+            </a:r>
+            <a:r>
+              <a:rPr sz="1600" b="0" i="0">
+                <a:solidFill>
+                  <a:srgbClr val="2B2B2B"/>
+                </a:solidFill>
+                <a:latin typeface="Calibri"/>
+              </a:rPr>
+              <a:t> entréguele a su compañero las </a:t>
+            </a:r>
+            <a:r>
+              <a:rPr sz="1600" b="1" i="0">
+                <a:solidFill>
+                  <a:srgbClr val="2B2B2B"/>
+                </a:solidFill>
+                <a:latin typeface="Calibri"/>
+              </a:rPr>
+              <a:t>tres frases</a:t>
+            </a:r>
+            <a:r>
+              <a:rPr sz="1600" b="0" i="0">
+                <a:solidFill>
+                  <a:srgbClr val="2B2B2B"/>
+                </a:solidFill>
+                <a:latin typeface="Calibri"/>
+              </a:rPr>
+              <a:t> —me quedó claro / no me quedó claro / le sugiero—.</a:t>
             </a:r>
           </a:p>
           <a:p>
@@ -5476,7 +5481,7 @@
               </a:spcAft>
             </a:pPr>
             <a:r>
-              <a:rPr sz="1400" b="0" i="0">
+              <a:rPr sz="1600" b="0" i="0">
                 <a:solidFill>
                   <a:srgbClr val="2B2B2B"/>
                 </a:solidFill>
@@ -5485,58 +5490,76 @@
               <a:t>–   </a:t>
             </a:r>
             <a:r>
-              <a:rPr sz="1400" b="1" i="0">
-                <a:solidFill>
-                  <a:srgbClr val="2B2B2B"/>
-                </a:solidFill>
-                <a:latin typeface="Calibri"/>
-              </a:rPr>
-              <a:t>Paso 4 (2 min) · Abra CDigital</a:t>
-            </a:r>
-            <a:r>
-              <a:rPr sz="1400" b="0" i="0">
-                <a:solidFill>
-                  <a:srgbClr val="2B2B2B"/>
-                </a:solidFill>
-                <a:latin typeface="Calibri"/>
-              </a:rPr>
-              <a:t> y verifique que ve los espacios de </a:t>
-            </a:r>
-            <a:r>
-              <a:rPr sz="1400" b="1" i="0">
-                <a:solidFill>
-                  <a:srgbClr val="2B2B2B"/>
-                </a:solidFill>
-                <a:latin typeface="Calibri"/>
-              </a:rPr>
-              <a:t>autoevaluación</a:t>
-            </a:r>
-            <a:r>
-              <a:rPr sz="1400" b="0" i="0">
-                <a:solidFill>
-                  <a:srgbClr val="2B2B2B"/>
-                </a:solidFill>
-                <a:latin typeface="Calibri"/>
-              </a:rPr>
-              <a:t> y </a:t>
-            </a:r>
-            <a:r>
-              <a:rPr sz="1400" b="1" i="0">
-                <a:solidFill>
-                  <a:srgbClr val="2B2B2B"/>
-                </a:solidFill>
-                <a:latin typeface="Calibri"/>
-              </a:rPr>
-              <a:t>coevaluación</a:t>
-            </a:r>
-            <a:r>
-              <a:rPr sz="1400" b="0" i="0">
-                <a:solidFill>
-                  <a:srgbClr val="2B2B2B"/>
-                </a:solidFill>
-                <a:latin typeface="Calibri"/>
-              </a:rPr>
-              <a:t>, y sus fechas.</a:t>
+              <a:rPr sz="1600" b="1" i="0">
+                <a:solidFill>
+                  <a:srgbClr val="2B2B2B"/>
+                </a:solidFill>
+                <a:latin typeface="Calibri"/>
+              </a:rPr>
+              <a:t>Paso 3</a:t>
+            </a:r>
+            <a:r>
+              <a:rPr sz="1600" b="0" i="0">
+                <a:solidFill>
+                  <a:srgbClr val="2B2B2B"/>
+                </a:solidFill>
+                <a:latin typeface="Calibri"/>
+              </a:rPr>
+              <a:t> · </a:t>
+            </a:r>
+            <a:r>
+              <a:rPr sz="1600" b="1" i="0">
+                <a:solidFill>
+                  <a:srgbClr val="2B2B2B"/>
+                </a:solidFill>
+                <a:latin typeface="Calibri"/>
+              </a:rPr>
+              <a:t>Revisión de costuras:</a:t>
+            </a:r>
+            <a:r>
+              <a:rPr sz="1600" b="0" i="0">
+                <a:solidFill>
+                  <a:srgbClr val="2B2B2B"/>
+                </a:solidFill>
+                <a:latin typeface="Calibri"/>
+              </a:rPr>
+              <a:t> con la devolución en la mano, revise las </a:t>
+            </a:r>
+            <a:r>
+              <a:rPr sz="1600" b="1" i="0">
+                <a:solidFill>
+                  <a:srgbClr val="2B2B2B"/>
+                </a:solidFill>
+                <a:latin typeface="Calibri"/>
+              </a:rPr>
+              <a:t>seis costuras</a:t>
+            </a:r>
+            <a:r>
+              <a:rPr sz="1600" b="0" i="0">
+                <a:solidFill>
+                  <a:srgbClr val="2B2B2B"/>
+                </a:solidFill>
+                <a:latin typeface="Calibri"/>
+              </a:rPr>
+              <a:t> de su documento y </a:t>
+            </a:r>
+            <a:r>
+              <a:rPr sz="1600" b="1" i="0">
+                <a:solidFill>
+                  <a:srgbClr val="2B2B2B"/>
+                </a:solidFill>
+                <a:latin typeface="Calibri"/>
+              </a:rPr>
+              <a:t>anote</a:t>
+            </a:r>
+            <a:r>
+              <a:rPr sz="1600" b="0" i="0">
+                <a:solidFill>
+                  <a:srgbClr val="2B2B2B"/>
+                </a:solidFill>
+                <a:latin typeface="Calibri"/>
+              </a:rPr>
+              <a:t> los ajustes. No los haga ahora: escribir la lista es el producto del taller.</a:t>
             </a:r>
           </a:p>
           <a:p>
@@ -5546,7 +5569,7 @@
               </a:spcAft>
             </a:pPr>
             <a:r>
-              <a:rPr sz="1400" b="0" i="0">
+              <a:rPr sz="1600" b="0" i="0">
                 <a:solidFill>
                   <a:srgbClr val="2B2B2B"/>
                 </a:solidFill>
@@ -5555,92 +5578,76 @@
               <a:t>–   </a:t>
             </a:r>
             <a:r>
-              <a:rPr sz="1400" b="1" i="0">
-                <a:solidFill>
-                  <a:srgbClr val="2B2B2B"/>
-                </a:solidFill>
-                <a:latin typeface="Calibri"/>
-              </a:rPr>
-              <a:t>Criterio de éxito verificable:</a:t>
-            </a:r>
-            <a:r>
-              <a:rPr sz="1400" b="0" i="0">
-                <a:solidFill>
-                  <a:srgbClr val="2B2B2B"/>
-                </a:solidFill>
-                <a:latin typeface="Calibri"/>
-              </a:rPr>
-              <a:t> sale de la sesión con </a:t>
-            </a:r>
-            <a:r>
-              <a:rPr sz="1400" b="1" i="0">
-                <a:solidFill>
-                  <a:srgbClr val="2B2B2B"/>
-                </a:solidFill>
-                <a:latin typeface="Calibri"/>
-              </a:rPr>
-              <a:t>una lista escrita de ajustes</a:t>
-            </a:r>
-            <a:r>
-              <a:rPr sz="1400" b="0" i="0">
-                <a:solidFill>
-                  <a:srgbClr val="2B2B2B"/>
-                </a:solidFill>
-                <a:latin typeface="Calibri"/>
-              </a:rPr>
-              <a:t> —mínimo tres— y con </a:t>
-            </a:r>
-            <a:r>
-              <a:rPr sz="1400" b="1" i="0">
-                <a:solidFill>
-                  <a:srgbClr val="2B2B2B"/>
-                </a:solidFill>
-                <a:latin typeface="Calibri"/>
-              </a:rPr>
-              <a:t>la devolución de un compañero</a:t>
-            </a:r>
-            <a:r>
-              <a:rPr sz="1400" b="0" i="0">
-                <a:solidFill>
-                  <a:srgbClr val="2B2B2B"/>
-                </a:solidFill>
-                <a:latin typeface="Calibri"/>
-              </a:rPr>
-              <a:t> anotada, no recordada.</a:t>
-            </a:r>
-          </a:p>
-          <a:p>
-            <a:pPr lvl="1">
-              <a:spcAft>
-                <a:spcPts val="600"/>
-              </a:spcAft>
-            </a:pPr>
-            <a:r>
-              <a:rPr sz="1300" b="0" i="0">
-                <a:solidFill>
-                  <a:srgbClr val="2B2B2B"/>
-                </a:solidFill>
-                <a:latin typeface="Calibri"/>
-              </a:rPr>
-              <a:t>●   Segunda verificación: su compañero pudo repetir su </a:t>
-            </a:r>
-            <a:r>
-              <a:rPr sz="1300" b="1" i="0">
-                <a:solidFill>
-                  <a:srgbClr val="2B2B2B"/>
-                </a:solidFill>
-                <a:latin typeface="Calibri"/>
-              </a:rPr>
-              <a:t>dolor, su valor y su pedido</a:t>
-            </a:r>
-            <a:r>
-              <a:rPr sz="1300" b="0" i="0">
-                <a:solidFill>
-                  <a:srgbClr val="2B2B2B"/>
-                </a:solidFill>
-                <a:latin typeface="Calibri"/>
-              </a:rPr>
-              <a:t> sin mirar el documento.</a:t>
+              <a:rPr sz="1600" b="1" i="0">
+                <a:solidFill>
+                  <a:srgbClr val="2B2B2B"/>
+                </a:solidFill>
+                <a:latin typeface="Calibri"/>
+              </a:rPr>
+              <a:t>Paso 4</a:t>
+            </a:r>
+            <a:r>
+              <a:rPr sz="1600" b="0" i="0">
+                <a:solidFill>
+                  <a:srgbClr val="2B2B2B"/>
+                </a:solidFill>
+                <a:latin typeface="Calibri"/>
+              </a:rPr>
+              <a:t> · </a:t>
+            </a:r>
+            <a:r>
+              <a:rPr sz="1600" b="1" i="0">
+                <a:solidFill>
+                  <a:srgbClr val="2B2B2B"/>
+                </a:solidFill>
+                <a:latin typeface="Calibri"/>
+              </a:rPr>
+              <a:t>Abra CDigital</a:t>
+            </a:r>
+            <a:r>
+              <a:rPr sz="1600" b="0" i="0">
+                <a:solidFill>
+                  <a:srgbClr val="2B2B2B"/>
+                </a:solidFill>
+                <a:latin typeface="Calibri"/>
+              </a:rPr>
+              <a:t> y verifique que ve los espacios de </a:t>
+            </a:r>
+            <a:r>
+              <a:rPr sz="1600" b="1" i="0">
+                <a:solidFill>
+                  <a:srgbClr val="2B2B2B"/>
+                </a:solidFill>
+                <a:latin typeface="Calibri"/>
+              </a:rPr>
+              <a:t>autoevaluación</a:t>
+            </a:r>
+            <a:r>
+              <a:rPr sz="1600" b="0" i="0">
+                <a:solidFill>
+                  <a:srgbClr val="2B2B2B"/>
+                </a:solidFill>
+                <a:latin typeface="Calibri"/>
+              </a:rPr>
+              <a:t> y </a:t>
+            </a:r>
+            <a:r>
+              <a:rPr sz="1600" b="1" i="0">
+                <a:solidFill>
+                  <a:srgbClr val="2B2B2B"/>
+                </a:solidFill>
+                <a:latin typeface="Calibri"/>
+              </a:rPr>
+              <a:t>coevaluación</a:t>
+            </a:r>
+            <a:r>
+              <a:rPr sz="1600" b="0" i="0">
+                <a:solidFill>
+                  <a:srgbClr val="2B2B2B"/>
+                </a:solidFill>
+                <a:latin typeface="Calibri"/>
+              </a:rPr>
+              <a:t>, y sus fechas.</a:t>
             </a:r>
           </a:p>
           <a:p>
@@ -5650,38 +5657,56 @@
               </a:spcAft>
             </a:pPr>
             <a:r>
-              <a:rPr sz="1400" b="0" i="0">
-                <a:solidFill>
-                  <a:srgbClr val="2B2B2B"/>
-                </a:solidFill>
-                <a:latin typeface="Calibri"/>
-              </a:rPr>
-              <a:t>–   Quien no alcance a sustentar hoy lo hace por el </a:t>
-            </a:r>
-            <a:r>
-              <a:rPr sz="1400" b="1" i="0">
-                <a:solidFill>
-                  <a:srgbClr val="2B2B2B"/>
-                </a:solidFill>
-                <a:latin typeface="Calibri"/>
-              </a:rPr>
-              <a:t>foro del curso</a:t>
-            </a:r>
-            <a:r>
-              <a:rPr sz="1400" b="0" i="0">
-                <a:solidFill>
-                  <a:srgbClr val="2B2B2B"/>
-                </a:solidFill>
-                <a:latin typeface="Calibri"/>
-              </a:rPr>
-              <a:t>: guion del pitch escrito + la frase de qué está listo y qué falta.</a:t>
-            </a:r>
-          </a:p>
-        </p:txBody>
-      </p:sp>
-      <p:sp>
-        <p:nvSpPr>
-          <p:cNvPr id="5" name="TextBox 4"/>
+              <a:rPr sz="1600" b="0" i="0">
+                <a:solidFill>
+                  <a:srgbClr val="2B2B2B"/>
+                </a:solidFill>
+                <a:latin typeface="Calibri"/>
+              </a:rPr>
+              <a:t>–   </a:t>
+            </a:r>
+            <a:r>
+              <a:rPr sz="1600" b="1" i="0">
+                <a:solidFill>
+                  <a:srgbClr val="2B2B2B"/>
+                </a:solidFill>
+                <a:latin typeface="Calibri"/>
+              </a:rPr>
+              <a:t>En clase, sin falta:</a:t>
+            </a:r>
+            <a:r>
+              <a:rPr sz="1600" b="0" i="0">
+                <a:solidFill>
+                  <a:srgbClr val="2B2B2B"/>
+                </a:solidFill>
+                <a:latin typeface="Calibri"/>
+              </a:rPr>
+              <a:t> los </a:t>
+            </a:r>
+            <a:r>
+              <a:rPr sz="1600" b="1" i="0">
+                <a:solidFill>
+                  <a:srgbClr val="2B2B2B"/>
+                </a:solidFill>
+                <a:latin typeface="Calibri"/>
+              </a:rPr>
+              <a:t>pasos 1 a 2</a:t>
+            </a:r>
+            <a:r>
+              <a:rPr sz="1600" b="0" i="0">
+                <a:solidFill>
+                  <a:srgbClr val="2B2B2B"/>
+                </a:solidFill>
+                <a:latin typeface="Calibri"/>
+              </a:rPr>
+              <a:t>. Del 3 en adelante puede quedar en trabajo autónomo, pero antes de la próxima sesión.</a:t>
+            </a:r>
+          </a:p>
+        </p:txBody>
+      </p:sp>
+      <p:sp>
+        <p:nvSpPr>
+          <p:cNvPr id="6" name="TextBox 5"/>
           <p:cNvSpPr txBox="1"/>
           <p:nvPr/>
         </p:nvSpPr>
@@ -5716,7 +5741,7 @@
       </p:sp>
       <p:sp>
         <p:nvSpPr>
-          <p:cNvPr id="6" name="TextBox 5"/>
+          <p:cNvPr id="7" name="TextBox 6"/>
           <p:cNvSpPr txBox="1"/>
           <p:nvPr/>
         </p:nvSpPr>
@@ -5848,6 +5873,568 @@
                 </a:solidFill>
                 <a:latin typeface="Calibri"/>
               </a:rPr>
+              <a:t>TALLER · cómo se revisa y dónde se entrega</a:t>
+            </a:r>
+          </a:p>
+        </p:txBody>
+      </p:sp>
+      <p:sp>
+        <p:nvSpPr>
+          <p:cNvPr id="4" name="TextBox 3"/>
+          <p:cNvSpPr txBox="1"/>
+          <p:nvPr/>
+        </p:nvSpPr>
+        <p:spPr>
+          <a:xfrm>
+            <a:off x="640080" y="1280160"/>
+            <a:ext cx="10911535" cy="411480"/>
+          </a:xfrm>
+          <a:prstGeom prst="rect">
+            <a:avLst/>
+          </a:prstGeom>
+          <a:noFill/>
+        </p:spPr>
+        <p:txBody>
+          <a:bodyPr wrap="square" anchor="t" lIns="0" rIns="0" tIns="0" bIns="0">
+            <a:spAutoFit/>
+          </a:bodyPr>
+          <a:lstStyle/>
+          <a:p>
+            <a:pPr algn="ctr"/>
+            <a:r>
+              <a:rPr sz="1500" b="0" i="0">
+                <a:solidFill>
+                  <a:srgbClr val="2B2B2B"/>
+                </a:solidFill>
+                <a:latin typeface="Calibri"/>
+              </a:rPr>
+              <a:t>Sustentación cruzada y consolidación</a:t>
+            </a:r>
+          </a:p>
+        </p:txBody>
+      </p:sp>
+      <p:sp>
+        <p:nvSpPr>
+          <p:cNvPr id="5" name="TextBox 4"/>
+          <p:cNvSpPr txBox="1"/>
+          <p:nvPr/>
+        </p:nvSpPr>
+        <p:spPr>
+          <a:xfrm>
+            <a:off x="640080" y="2011679"/>
+            <a:ext cx="10911535" cy="4297680"/>
+          </a:xfrm>
+          <a:prstGeom prst="rect">
+            <a:avLst/>
+          </a:prstGeom>
+          <a:noFill/>
+        </p:spPr>
+        <p:txBody>
+          <a:bodyPr wrap="square" anchor="t" lIns="0" rIns="0" tIns="0" bIns="0">
+            <a:spAutoFit/>
+          </a:bodyPr>
+          <a:lstStyle/>
+          <a:p>
+            <a:pPr>
+              <a:spcAft>
+                <a:spcPts val="1000"/>
+              </a:spcAft>
+            </a:pPr>
+            <a:r>
+              <a:rPr sz="1600" b="0" i="0">
+                <a:solidFill>
+                  <a:srgbClr val="2B2B2B"/>
+                </a:solidFill>
+                <a:latin typeface="Calibri"/>
+              </a:rPr>
+              <a:t>–   </a:t>
+            </a:r>
+            <a:r>
+              <a:rPr sz="1600" b="1" i="0">
+                <a:solidFill>
+                  <a:srgbClr val="2B2B2B"/>
+                </a:solidFill>
+                <a:latin typeface="Calibri"/>
+              </a:rPr>
+              <a:t>Quedó bien si</a:t>
+            </a:r>
+            <a:r>
+              <a:rPr sz="1600" b="0" i="0">
+                <a:solidFill>
+                  <a:srgbClr val="2B2B2B"/>
+                </a:solidFill>
+                <a:latin typeface="Calibri"/>
+              </a:rPr>
+              <a:t> —compruébelo usted antes de cerrar el documento—:</a:t>
+            </a:r>
+          </a:p>
+          <a:p>
+            <a:pPr lvl="1">
+              <a:spcAft>
+                <a:spcPts val="600"/>
+              </a:spcAft>
+            </a:pPr>
+            <a:r>
+              <a:rPr sz="1500" b="0" i="0">
+                <a:solidFill>
+                  <a:srgbClr val="2B2B2B"/>
+                </a:solidFill>
+                <a:latin typeface="Calibri"/>
+              </a:rPr>
+              <a:t>●   Sale con </a:t>
+            </a:r>
+            <a:r>
+              <a:rPr sz="1500" b="1" i="0">
+                <a:solidFill>
+                  <a:srgbClr val="2B2B2B"/>
+                </a:solidFill>
+                <a:latin typeface="Calibri"/>
+              </a:rPr>
+              <a:t>mínimo tres ajustes escritos</a:t>
+            </a:r>
+            <a:r>
+              <a:rPr sz="1500" b="0" i="0">
+                <a:solidFill>
+                  <a:srgbClr val="2B2B2B"/>
+                </a:solidFill>
+                <a:latin typeface="Calibri"/>
+              </a:rPr>
+              <a:t>, no recordados.</a:t>
+            </a:r>
+          </a:p>
+          <a:p>
+            <a:pPr lvl="1">
+              <a:spcAft>
+                <a:spcPts val="600"/>
+              </a:spcAft>
+            </a:pPr>
+            <a:r>
+              <a:rPr sz="1500" b="0" i="0">
+                <a:solidFill>
+                  <a:srgbClr val="2B2B2B"/>
+                </a:solidFill>
+                <a:latin typeface="Calibri"/>
+              </a:rPr>
+              <a:t>●   Tiene </a:t>
+            </a:r>
+            <a:r>
+              <a:rPr sz="1500" b="1" i="0">
+                <a:solidFill>
+                  <a:srgbClr val="2B2B2B"/>
+                </a:solidFill>
+                <a:latin typeface="Calibri"/>
+              </a:rPr>
+              <a:t>anotada</a:t>
+            </a:r>
+            <a:r>
+              <a:rPr sz="1500" b="0" i="0">
+                <a:solidFill>
+                  <a:srgbClr val="2B2B2B"/>
+                </a:solidFill>
+                <a:latin typeface="Calibri"/>
+              </a:rPr>
+              <a:t> la devolución de un compañero.</a:t>
+            </a:r>
+          </a:p>
+          <a:p>
+            <a:pPr lvl="1">
+              <a:spcAft>
+                <a:spcPts val="600"/>
+              </a:spcAft>
+            </a:pPr>
+            <a:r>
+              <a:rPr sz="1500" b="0" i="0">
+                <a:solidFill>
+                  <a:srgbClr val="2B2B2B"/>
+                </a:solidFill>
+                <a:latin typeface="Calibri"/>
+              </a:rPr>
+              <a:t>●   Su compañero pudo repetir su </a:t>
+            </a:r>
+            <a:r>
+              <a:rPr sz="1500" b="1" i="0">
+                <a:solidFill>
+                  <a:srgbClr val="2B2B2B"/>
+                </a:solidFill>
+                <a:latin typeface="Calibri"/>
+              </a:rPr>
+              <a:t>dolor, su valor y su pedido</a:t>
+            </a:r>
+            <a:r>
+              <a:rPr sz="1500" b="0" i="0">
+                <a:solidFill>
+                  <a:srgbClr val="2B2B2B"/>
+                </a:solidFill>
+                <a:latin typeface="Calibri"/>
+              </a:rPr>
+              <a:t> sin mirar el documento.</a:t>
+            </a:r>
+          </a:p>
+          <a:p>
+            <a:pPr>
+              <a:spcAft>
+                <a:spcPts val="1000"/>
+              </a:spcAft>
+            </a:pPr>
+            <a:r>
+              <a:rPr sz="1600" b="0" i="0">
+                <a:solidFill>
+                  <a:srgbClr val="2B2B2B"/>
+                </a:solidFill>
+                <a:latin typeface="Calibri"/>
+              </a:rPr>
+              <a:t>–   </a:t>
+            </a:r>
+            <a:r>
+              <a:rPr sz="1600" b="1" i="0">
+                <a:solidFill>
+                  <a:srgbClr val="2B2B2B"/>
+                </a:solidFill>
+                <a:latin typeface="Calibri"/>
+              </a:rPr>
+              <a:t>Plan B:</a:t>
+            </a:r>
+            <a:r>
+              <a:rPr sz="1600" b="0" i="0">
+                <a:solidFill>
+                  <a:srgbClr val="2B2B2B"/>
+                </a:solidFill>
+                <a:latin typeface="Calibri"/>
+              </a:rPr>
+              <a:t> Si no alcanza a sustentar hoy, hágalo por el </a:t>
+            </a:r>
+            <a:r>
+              <a:rPr sz="1600" b="1" i="0">
+                <a:solidFill>
+                  <a:srgbClr val="2B2B2B"/>
+                </a:solidFill>
+                <a:latin typeface="Calibri"/>
+              </a:rPr>
+              <a:t>foro del curso</a:t>
+            </a:r>
+            <a:r>
+              <a:rPr sz="1600" b="0" i="0">
+                <a:solidFill>
+                  <a:srgbClr val="2B2B2B"/>
+                </a:solidFill>
+                <a:latin typeface="Calibri"/>
+              </a:rPr>
+              <a:t>: el guion del pitch escrito más la frase de qué está listo y qué falta.</a:t>
+            </a:r>
+          </a:p>
+          <a:p>
+            <a:pPr>
+              <a:spcAft>
+                <a:spcPts val="1000"/>
+              </a:spcAft>
+            </a:pPr>
+            <a:r>
+              <a:rPr sz="1600" b="0" i="0">
+                <a:solidFill>
+                  <a:srgbClr val="2B2B2B"/>
+                </a:solidFill>
+                <a:latin typeface="Calibri"/>
+              </a:rPr>
+              <a:t>–   </a:t>
+            </a:r>
+            <a:r>
+              <a:rPr sz="1600" b="1" i="0">
+                <a:solidFill>
+                  <a:srgbClr val="2B2B2B"/>
+                </a:solidFill>
+                <a:latin typeface="Calibri"/>
+              </a:rPr>
+              <a:t>Las entregas documentales del aula ya cerraron:</a:t>
+            </a:r>
+            <a:r>
+              <a:rPr sz="1600" b="0" i="0">
+                <a:solidFill>
+                  <a:srgbClr val="2B2B2B"/>
+                </a:solidFill>
+                <a:latin typeface="Calibri"/>
+              </a:rPr>
+              <a:t> la </a:t>
+            </a:r>
+            <a:r>
+              <a:rPr sz="1600" b="1" i="0">
+                <a:solidFill>
+                  <a:srgbClr val="2B2B2B"/>
+                </a:solidFill>
+                <a:latin typeface="Calibri"/>
+              </a:rPr>
+              <a:t>ACA Final</a:t>
+            </a:r>
+            <a:r>
+              <a:rPr sz="1600" b="0" i="0">
+                <a:solidFill>
+                  <a:srgbClr val="2B2B2B"/>
+                </a:solidFill>
+                <a:latin typeface="Calibri"/>
+              </a:rPr>
+              <a:t> cerró en la semana de la </a:t>
+            </a:r>
+            <a:r>
+              <a:rPr sz="1600" b="1" i="0">
+                <a:solidFill>
+                  <a:srgbClr val="2B2B2B"/>
+                </a:solidFill>
+                <a:latin typeface="Calibri"/>
+              </a:rPr>
+              <a:t>Sesión 06</a:t>
+            </a:r>
+            <a:r>
+              <a:rPr sz="1600" b="0" i="0">
+                <a:solidFill>
+                  <a:srgbClr val="2B2B2B"/>
+                </a:solidFill>
+                <a:latin typeface="Calibri"/>
+              </a:rPr>
+              <a:t>. Guarde `S07_AjustesCierre_Apellido` (Google Doc o PDF) en su Drive.</a:t>
+            </a:r>
+          </a:p>
+          <a:p>
+            <a:pPr>
+              <a:spcAft>
+                <a:spcPts val="1000"/>
+              </a:spcAft>
+            </a:pPr>
+            <a:r>
+              <a:rPr sz="1600" b="0" i="0">
+                <a:solidFill>
+                  <a:srgbClr val="2B2B2B"/>
+                </a:solidFill>
+                <a:latin typeface="Calibri"/>
+              </a:rPr>
+              <a:t>–   </a:t>
+            </a:r>
+            <a:r>
+              <a:rPr sz="1600" b="1" i="0">
+                <a:solidFill>
+                  <a:srgbClr val="2B2B2B"/>
+                </a:solidFill>
+                <a:latin typeface="Calibri"/>
+              </a:rPr>
+              <a:t>Esta semana el aula sí espera:</a:t>
+            </a:r>
+            <a:r>
+              <a:rPr sz="1600" b="0" i="0">
+                <a:solidFill>
+                  <a:srgbClr val="2B2B2B"/>
+                </a:solidFill>
+                <a:latin typeface="Calibri"/>
+              </a:rPr>
+              <a:t> </a:t>
+            </a:r>
+            <a:r>
+              <a:rPr sz="1600" b="1" i="0">
+                <a:solidFill>
+                  <a:srgbClr val="2B2B2B"/>
+                </a:solidFill>
+                <a:latin typeface="Calibri"/>
+              </a:rPr>
+              <a:t>Autoevaluación</a:t>
+            </a:r>
+            <a:r>
+              <a:rPr sz="1600" b="0" i="0">
+                <a:solidFill>
+                  <a:srgbClr val="2B2B2B"/>
+                </a:solidFill>
+                <a:latin typeface="Calibri"/>
+              </a:rPr>
+              <a:t> (1,6%) y </a:t>
+            </a:r>
+            <a:r>
+              <a:rPr sz="1600" b="1" i="0">
+                <a:solidFill>
+                  <a:srgbClr val="2B2B2B"/>
+                </a:solidFill>
+                <a:latin typeface="Calibri"/>
+              </a:rPr>
+              <a:t>Coevaluación</a:t>
+            </a:r>
+            <a:r>
+              <a:rPr sz="1600" b="0" i="0">
+                <a:solidFill>
+                  <a:srgbClr val="2B2B2B"/>
+                </a:solidFill>
+                <a:latin typeface="Calibri"/>
+              </a:rPr>
+              <a:t> (1,6%). Eso se responde </a:t>
+            </a:r>
+            <a:r>
+              <a:rPr sz="1600" b="1" i="0">
+                <a:solidFill>
+                  <a:srgbClr val="2B2B2B"/>
+                </a:solidFill>
+                <a:latin typeface="Calibri"/>
+              </a:rPr>
+              <a:t>en </a:t>
+            </a:r>
+            <a:r>
+              <a:rPr sz="1600" b="0" i="0">
+                <a:solidFill>
+                  <a:srgbClr val="2B2B2B"/>
+                </a:solidFill>
+                <a:latin typeface="Calibri"/>
+              </a:rPr>
+              <a:t>CDigital</a:t>
+            </a:r>
+            <a:r>
+              <a:rPr sz="1600" b="1" i="0">
+                <a:solidFill>
+                  <a:srgbClr val="2B2B2B"/>
+                </a:solidFill>
+                <a:latin typeface="Calibri"/>
+              </a:rPr>
+              <a:t/>
+            </a:r>
+            <a:r>
+              <a:rPr sz="1600" b="0" i="0">
+                <a:solidFill>
+                  <a:srgbClr val="2B2B2B"/>
+                </a:solidFill>
+                <a:latin typeface="Calibri"/>
+              </a:rPr>
+              <a:t>, no se sube como archivo.</a:t>
+            </a:r>
+          </a:p>
+        </p:txBody>
+      </p:sp>
+      <p:sp>
+        <p:nvSpPr>
+          <p:cNvPr id="6" name="TextBox 5"/>
+          <p:cNvSpPr txBox="1"/>
+          <p:nvPr/>
+        </p:nvSpPr>
+        <p:spPr>
+          <a:xfrm>
+            <a:off x="11094415" y="6446520"/>
+            <a:ext cx="548640" cy="274320"/>
+          </a:xfrm>
+          <a:prstGeom prst="rect">
+            <a:avLst/>
+          </a:prstGeom>
+          <a:noFill/>
+        </p:spPr>
+        <p:txBody>
+          <a:bodyPr wrap="square" anchor="t" lIns="0" rIns="0" tIns="0" bIns="0">
+            <a:spAutoFit/>
+          </a:bodyPr>
+          <a:lstStyle/>
+          <a:p>
+            <a:pPr algn="r"/>
+            <a:r>
+              <a:rPr sz="1000" b="1" i="0">
+                <a:solidFill>
+                  <a:srgbClr val="8F989D"/>
+                </a:solidFill>
+                <a:latin typeface="Calibri"/>
+              </a:rPr>
+              <a:t>15</a:t>
+            </a:r>
+          </a:p>
+        </p:txBody>
+      </p:sp>
+    </p:spTree>
+  </p:cSld>
+  <p:clrMapOvr>
+    <a:masterClrMapping/>
+  </p:clrMapOvr>
+</p:sld>
+</file>
+
+<file path=ppt/slides/slide16.xml><?xml version="1.0" encoding="utf-8"?>
+<p:sld xmlns:a="http://schemas.openxmlformats.org/drawingml/2006/main" xmlns:p="http://schemas.openxmlformats.org/presentationml/2006/main" xmlns:r="http://schemas.openxmlformats.org/officeDocument/2006/relationships">
+  <p:cSld>
+    <p:bg>
+      <p:bgPr>
+        <a:solidFill>
+          <a:srgbClr val="FFFFFF"/>
+        </a:solidFill>
+        <a:effectLst/>
+      </p:bgPr>
+    </p:bg>
+    <p:spTree>
+      <p:nvGrpSpPr>
+        <p:cNvPr id="1" name=""/>
+        <p:cNvGrpSpPr/>
+        <p:nvPr/>
+      </p:nvGrpSpPr>
+      <p:grpSpPr/>
+      <p:sp>
+        <p:nvSpPr>
+          <p:cNvPr id="2" name="Rectangle 1"/>
+          <p:cNvSpPr/>
+          <p:nvPr/>
+        </p:nvSpPr>
+        <p:spPr>
+          <a:xfrm>
+            <a:off x="0" y="0"/>
+            <a:ext cx="12191695" cy="1188720"/>
+          </a:xfrm>
+          <a:prstGeom prst="rect">
+            <a:avLst/>
+          </a:prstGeom>
+          <a:solidFill>
+            <a:srgbClr val="0C2340"/>
+          </a:solidFill>
+          <a:ln>
+            <a:noFill/>
+          </a:ln>
+          <a:effectLst/>
+        </p:spPr>
+        <p:style>
+          <a:lnRef idx="1">
+            <a:schemeClr val="accent1"/>
+          </a:lnRef>
+          <a:fillRef idx="3">
+            <a:schemeClr val="accent1"/>
+          </a:fillRef>
+          <a:effectRef idx="2">
+            <a:schemeClr val="accent1"/>
+          </a:effectRef>
+          <a:fontRef idx="minor">
+            <a:schemeClr val="lt1"/>
+          </a:fontRef>
+        </p:style>
+        <p:txBody>
+          <a:bodyPr rtlCol="0" anchor="ctr"/>
+          <a:lstStyle/>
+          <a:p>
+            <a:pPr algn="ctr"/>
+          </a:p>
+        </p:txBody>
+      </p:sp>
+      <p:sp>
+        <p:nvSpPr>
+          <p:cNvPr id="3" name="TextBox 2"/>
+          <p:cNvSpPr txBox="1"/>
+          <p:nvPr/>
+        </p:nvSpPr>
+        <p:spPr>
+          <a:xfrm>
+            <a:off x="640080" y="0"/>
+            <a:ext cx="9082735" cy="1188720"/>
+          </a:xfrm>
+          <a:prstGeom prst="rect">
+            <a:avLst/>
+          </a:prstGeom>
+          <a:noFill/>
+        </p:spPr>
+        <p:txBody>
+          <a:bodyPr wrap="square" anchor="ctr" lIns="0" rIns="0" tIns="0" bIns="0">
+            <a:spAutoFit/>
+          </a:bodyPr>
+          <a:lstStyle/>
+          <a:p>
+            <a:pPr algn="ctr"/>
+            <a:r>
+              <a:rPr sz="2600" b="1" i="0">
+                <a:solidFill>
+                  <a:srgbClr val="FFFFFF"/>
+                </a:solidFill>
+                <a:latin typeface="Calibri"/>
+              </a:rPr>
               <a:t>Errores frecuentes en la sustentación</a:t>
             </a:r>
           </a:p>
@@ -6192,7 +6779,7 @@
                 </a:solidFill>
                 <a:latin typeface="Calibri"/>
               </a:rPr>
-              <a:t>15</a:t>
+              <a:t>16</a:t>
             </a:r>
           </a:p>
         </p:txBody>
@@ -6205,7 +6792,7 @@
 </p:sld>
 </file>
 
-<file path=ppt/slides/slide16.xml><?xml version="1.0" encoding="utf-8"?>
+<file path=ppt/slides/slide17.xml><?xml version="1.0" encoding="utf-8"?>
 <p:sld xmlns:a="http://schemas.openxmlformats.org/drawingml/2006/main" xmlns:p="http://schemas.openxmlformats.org/presentationml/2006/main" xmlns:r="http://schemas.openxmlformats.org/officeDocument/2006/relationships">
   <p:cSld>
     <p:bg>
@@ -6538,7 +7125,7 @@
                 </a:solidFill>
                 <a:latin typeface="Calibri"/>
               </a:rPr>
-              <a:t>16</a:t>
+              <a:t>17</a:t>
             </a:r>
           </a:p>
         </p:txBody>
@@ -6551,7 +7138,7 @@
 </p:sld>
 </file>
 
-<file path=ppt/slides/slide17.xml><?xml version="1.0" encoding="utf-8"?>
+<file path=ppt/slides/slide18.xml><?xml version="1.0" encoding="utf-8"?>
 <p:sld xmlns:a="http://schemas.openxmlformats.org/drawingml/2006/main" xmlns:p="http://schemas.openxmlformats.org/presentationml/2006/main" xmlns:r="http://schemas.openxmlformats.org/officeDocument/2006/relationships">
   <p:cSld>
     <p:bg>
@@ -6962,7 +7549,7 @@
                 </a:solidFill>
                 <a:latin typeface="Calibri"/>
               </a:rPr>
-              <a:t>17</a:t>
+              <a:t>18</a:t>
             </a:r>
           </a:p>
         </p:txBody>
@@ -6975,7 +7562,7 @@
 </p:sld>
 </file>
 
-<file path=ppt/slides/slide18.xml><?xml version="1.0" encoding="utf-8"?>
+<file path=ppt/slides/slide19.xml><?xml version="1.0" encoding="utf-8"?>
 <p:sld xmlns:a="http://schemas.openxmlformats.org/drawingml/2006/main" xmlns:p="http://schemas.openxmlformats.org/presentationml/2006/main" xmlns:r="http://schemas.openxmlformats.org/officeDocument/2006/relationships">
   <p:cSld>
     <p:bg>
@@ -7396,7 +7983,7 @@
                 </a:solidFill>
                 <a:latin typeface="Calibri"/>
               </a:rPr>
-              <a:t>–   Plataforma del curso: [URL CDigital — campus del curso pendiente]</a:t>
+              <a:t>–   Plataforma del curso: https://cdigital.cun.edu.co/course/view.php?id=115463</a:t>
             </a:r>
           </a:p>
         </p:txBody>
@@ -7431,7 +8018,7 @@
                 </a:solidFill>
                 <a:latin typeface="Calibri"/>
               </a:rPr>
-              <a:t>18</a:t>
+              <a:t>19</a:t>
             </a:r>
           </a:p>
         </p:txBody>
@@ -7444,7 +8031,7 @@
 </p:sld>
 </file>
 
-<file path=ppt/slides/slide19.xml><?xml version="1.0" encoding="utf-8"?>
+<file path=ppt/slides/slide2.xml><?xml version="1.0" encoding="utf-8"?>
 <p:sld xmlns:a="http://schemas.openxmlformats.org/drawingml/2006/main" xmlns:p="http://schemas.openxmlformats.org/presentationml/2006/main" xmlns:r="http://schemas.openxmlformats.org/officeDocument/2006/relationships">
   <p:cSld>
     <p:bg>
@@ -7536,7 +8123,7 @@
                 </a:solidFill>
                 <a:latin typeface="Calibri"/>
               </a:rPr>
-              <a:t>Cierre del curso · últimos pendientes (cont.)</a:t>
+              <a:t>Hoy no se entrega nada nuevo: hoy se sostiene lo que ya escribió</a:t>
             </a:r>
           </a:p>
         </p:txBody>
@@ -7575,7 +8162,7 @@
                 </a:solidFill>
                 <a:latin typeface="Calibri"/>
               </a:rPr>
-              <a:t>–   Cualquier duda administrativa, por el canal del curso. </a:t>
+              <a:t>–   La </a:t>
             </a:r>
             <a:r>
               <a:rPr sz="1600" b="1" i="0">
@@ -7584,7 +8171,324 @@
                 </a:solidFill>
                 <a:latin typeface="Calibri"/>
               </a:rPr>
-              <a:t>Gracias por el trabajo de todo el ciclo.</a:t>
+              <a:t>ACA Final ya cerró</a:t>
+            </a:r>
+            <a:r>
+              <a:rPr sz="1600" b="0" i="0">
+                <a:solidFill>
+                  <a:srgbClr val="2B2B2B"/>
+                </a:solidFill>
+                <a:latin typeface="Calibri"/>
+              </a:rPr>
+              <a:t> y el </a:t>
+            </a:r>
+            <a:r>
+              <a:rPr sz="1600" b="1" i="0">
+                <a:solidFill>
+                  <a:srgbClr val="2B2B2B"/>
+                </a:solidFill>
+                <a:latin typeface="Calibri"/>
+              </a:rPr>
+              <a:t>Quiz 3</a:t>
+            </a:r>
+            <a:r>
+              <a:rPr sz="1600" b="0" i="0">
+                <a:solidFill>
+                  <a:srgbClr val="2B2B2B"/>
+                </a:solidFill>
+                <a:latin typeface="Calibri"/>
+              </a:rPr>
+              <a:t> también. Esta sesión </a:t>
+            </a:r>
+            <a:r>
+              <a:rPr sz="1600" b="1" i="0">
+                <a:solidFill>
+                  <a:srgbClr val="2B2B2B"/>
+                </a:solidFill>
+                <a:latin typeface="Calibri"/>
+              </a:rPr>
+              <a:t>no tiene evaluación de contenido nueva</a:t>
+            </a:r>
+            <a:r>
+              <a:rPr sz="1600" b="0" i="0">
+                <a:solidFill>
+                  <a:srgbClr val="2B2B2B"/>
+                </a:solidFill>
+                <a:latin typeface="Calibri"/>
+              </a:rPr>
+              <a:t>, y eso no la hace menos importante.</a:t>
+            </a:r>
+          </a:p>
+          <a:p>
+            <a:pPr>
+              <a:spcAft>
+                <a:spcPts val="1000"/>
+              </a:spcAft>
+            </a:pPr>
+            <a:r>
+              <a:rPr sz="1600" b="0" i="0">
+                <a:solidFill>
+                  <a:srgbClr val="2B2B2B"/>
+                </a:solidFill>
+                <a:latin typeface="Calibri"/>
+              </a:rPr>
+              <a:t>–   Lo que sí pasa hoy, en este orden:</a:t>
+            </a:r>
+          </a:p>
+          <a:p>
+            <a:pPr lvl="1">
+              <a:spcAft>
+                <a:spcPts val="600"/>
+              </a:spcAft>
+            </a:pPr>
+            <a:r>
+              <a:rPr sz="1500" b="0" i="0">
+                <a:solidFill>
+                  <a:srgbClr val="2B2B2B"/>
+                </a:solidFill>
+                <a:latin typeface="Calibri"/>
+              </a:rPr>
+              <a:t>●   </a:t>
+            </a:r>
+            <a:r>
+              <a:rPr sz="1500" b="1" i="0">
+                <a:solidFill>
+                  <a:srgbClr val="2B2B2B"/>
+                </a:solidFill>
+                <a:latin typeface="Calibri"/>
+              </a:rPr>
+              <a:t>Sustentación</a:t>
+            </a:r>
+            <a:r>
+              <a:rPr sz="1500" b="0" i="0">
+                <a:solidFill>
+                  <a:srgbClr val="2B2B2B"/>
+                </a:solidFill>
+                <a:latin typeface="Calibri"/>
+              </a:rPr>
+              <a:t> — cada quien defiende su propuesta con el </a:t>
+            </a:r>
+            <a:r>
+              <a:rPr sz="1500" b="1" i="0">
+                <a:solidFill>
+                  <a:srgbClr val="2B2B2B"/>
+                </a:solidFill>
+                <a:latin typeface="Calibri"/>
+              </a:rPr>
+              <a:t>pitch de 60 segundos</a:t>
+            </a:r>
+            <a:r>
+              <a:rPr sz="1500" b="0" i="0">
+                <a:solidFill>
+                  <a:srgbClr val="2B2B2B"/>
+                </a:solidFill>
+                <a:latin typeface="Calibri"/>
+              </a:rPr>
+              <a:t> y responde dos preguntas.</a:t>
+            </a:r>
+          </a:p>
+          <a:p>
+            <a:pPr lvl="1">
+              <a:spcAft>
+                <a:spcPts val="600"/>
+              </a:spcAft>
+            </a:pPr>
+            <a:r>
+              <a:rPr sz="1500" b="0" i="0">
+                <a:solidFill>
+                  <a:srgbClr val="2B2B2B"/>
+                </a:solidFill>
+                <a:latin typeface="Calibri"/>
+              </a:rPr>
+              <a:t>●   </a:t>
+            </a:r>
+            <a:r>
+              <a:rPr sz="1500" b="1" i="0">
+                <a:solidFill>
+                  <a:srgbClr val="2B2B2B"/>
+                </a:solidFill>
+                <a:latin typeface="Calibri"/>
+              </a:rPr>
+              <a:t>Retroalimentación entre pares</a:t>
+            </a:r>
+            <a:r>
+              <a:rPr sz="1500" b="0" i="0">
+                <a:solidFill>
+                  <a:srgbClr val="2B2B2B"/>
+                </a:solidFill>
+                <a:latin typeface="Calibri"/>
+              </a:rPr>
+              <a:t> — con una fórmula, no con "me gustó".</a:t>
+            </a:r>
+          </a:p>
+          <a:p>
+            <a:pPr lvl="1">
+              <a:spcAft>
+                <a:spcPts val="600"/>
+              </a:spcAft>
+            </a:pPr>
+            <a:r>
+              <a:rPr sz="1500" b="0" i="0">
+                <a:solidFill>
+                  <a:srgbClr val="2B2B2B"/>
+                </a:solidFill>
+                <a:latin typeface="Calibri"/>
+              </a:rPr>
+              <a:t>●   </a:t>
+            </a:r>
+            <a:r>
+              <a:rPr sz="1500" b="1" i="0">
+                <a:solidFill>
+                  <a:srgbClr val="2B2B2B"/>
+                </a:solidFill>
+                <a:latin typeface="Calibri"/>
+              </a:rPr>
+              <a:t>Consolidación</a:t>
+            </a:r>
+            <a:r>
+              <a:rPr sz="1500" b="0" i="0">
+                <a:solidFill>
+                  <a:srgbClr val="2B2B2B"/>
+                </a:solidFill>
+                <a:latin typeface="Calibri"/>
+              </a:rPr>
+              <a:t> — revisión de coherencia del documento: que las siete piezas hablen del mismo proyecto.</a:t>
+            </a:r>
+          </a:p>
+          <a:p>
+            <a:pPr lvl="1">
+              <a:spcAft>
+                <a:spcPts val="600"/>
+              </a:spcAft>
+            </a:pPr>
+            <a:r>
+              <a:rPr sz="1500" b="0" i="0">
+                <a:solidFill>
+                  <a:srgbClr val="2B2B2B"/>
+                </a:solidFill>
+                <a:latin typeface="Calibri"/>
+              </a:rPr>
+              <a:t>●   </a:t>
+            </a:r>
+            <a:r>
+              <a:rPr sz="1500" b="1" i="0">
+                <a:solidFill>
+                  <a:srgbClr val="2B2B2B"/>
+                </a:solidFill>
+                <a:latin typeface="Calibri"/>
+              </a:rPr>
+              <a:t>Cierre</a:t>
+            </a:r>
+            <a:r>
+              <a:rPr sz="1500" b="0" i="0">
+                <a:solidFill>
+                  <a:srgbClr val="2B2B2B"/>
+                </a:solidFill>
+                <a:latin typeface="Calibri"/>
+              </a:rPr>
+              <a:t> — </a:t>
+            </a:r>
+            <a:r>
+              <a:rPr sz="1500" b="1" i="0">
+                <a:solidFill>
+                  <a:srgbClr val="2B2B2B"/>
+                </a:solidFill>
+                <a:latin typeface="Calibri"/>
+              </a:rPr>
+              <a:t>autoevaluación</a:t>
+            </a:r>
+            <a:r>
+              <a:rPr sz="1500" b="0" i="0">
+                <a:solidFill>
+                  <a:srgbClr val="2B2B2B"/>
+                </a:solidFill>
+                <a:latin typeface="Calibri"/>
+              </a:rPr>
+              <a:t> y </a:t>
+            </a:r>
+            <a:r>
+              <a:rPr sz="1500" b="1" i="0">
+                <a:solidFill>
+                  <a:srgbClr val="2B2B2B"/>
+                </a:solidFill>
+                <a:latin typeface="Calibri"/>
+              </a:rPr>
+              <a:t>coevaluación</a:t>
+            </a:r>
+            <a:r>
+              <a:rPr sz="1500" b="0" i="0">
+                <a:solidFill>
+                  <a:srgbClr val="2B2B2B"/>
+                </a:solidFill>
+                <a:latin typeface="Calibri"/>
+              </a:rPr>
+              <a:t>, que se abren hoy en CDigital, y la ruta de lo que sigue.</a:t>
+            </a:r>
+          </a:p>
+          <a:p>
+            <a:pPr>
+              <a:spcAft>
+                <a:spcPts val="1000"/>
+              </a:spcAft>
+            </a:pPr>
+            <a:r>
+              <a:rPr sz="1600" b="0" i="0">
+                <a:solidFill>
+                  <a:srgbClr val="2B2B2B"/>
+                </a:solidFill>
+                <a:latin typeface="Calibri"/>
+              </a:rPr>
+              <a:t>–   Por qué sustentar después de entregar sirve, y mucho:</a:t>
+            </a:r>
+          </a:p>
+          <a:p>
+            <a:pPr lvl="1">
+              <a:spcAft>
+                <a:spcPts val="600"/>
+              </a:spcAft>
+            </a:pPr>
+            <a:r>
+              <a:rPr sz="1500" b="0" i="0">
+                <a:solidFill>
+                  <a:srgbClr val="2B2B2B"/>
+                </a:solidFill>
+                <a:latin typeface="Calibri"/>
+              </a:rPr>
+              <a:t>●   Lo que usted responda hoy </a:t>
+            </a:r>
+            <a:r>
+              <a:rPr sz="1500" b="1" i="0">
+                <a:solidFill>
+                  <a:srgbClr val="2B2B2B"/>
+                </a:solidFill>
+                <a:latin typeface="Calibri"/>
+              </a:rPr>
+              <a:t>no cambia la nota de la ACA</a:t>
+            </a:r>
+            <a:r>
+              <a:rPr sz="1500" b="0" i="0">
+                <a:solidFill>
+                  <a:srgbClr val="2B2B2B"/>
+                </a:solidFill>
+                <a:latin typeface="Calibri"/>
+              </a:rPr>
+              <a:t>, pero sí cambia el documento con el que va a golpear puertas después.</a:t>
+            </a:r>
+          </a:p>
+          <a:p>
+            <a:pPr lvl="1">
+              <a:spcAft>
+                <a:spcPts val="600"/>
+              </a:spcAft>
+            </a:pPr>
+            <a:r>
+              <a:rPr sz="1500" b="0" i="0">
+                <a:solidFill>
+                  <a:srgbClr val="2B2B2B"/>
+                </a:solidFill>
+                <a:latin typeface="Calibri"/>
+              </a:rPr>
+              <a:t>●   Y descubrir hoy que no sabe explicar su propia propuesta en un minuto es mejor que descubrirlo en una entrevista.</a:t>
             </a:r>
           </a:p>
         </p:txBody>
@@ -7619,7 +8523,41 @@
                 </a:solidFill>
                 <a:latin typeface="Calibri"/>
               </a:rPr>
-              <a:t>19</a:t>
+              <a:t>2</a:t>
+            </a:r>
+          </a:p>
+        </p:txBody>
+      </p:sp>
+      <p:sp>
+        <p:nvSpPr>
+          <p:cNvPr id="6" name="TextBox 5"/>
+          <p:cNvSpPr txBox="1"/>
+          <p:nvPr/>
+        </p:nvSpPr>
+        <p:spPr>
+          <a:xfrm>
+            <a:off x="640080" y="5943600"/>
+            <a:ext cx="9997135" cy="457200"/>
+          </a:xfrm>
+          <a:prstGeom prst="rect">
+            <a:avLst/>
+          </a:prstGeom>
+          <a:noFill/>
+        </p:spPr>
+        <p:txBody>
+          <a:bodyPr wrap="square" anchor="t" lIns="0" rIns="0" tIns="0" bIns="0">
+            <a:spAutoFit/>
+          </a:bodyPr>
+          <a:lstStyle/>
+          <a:p>
+            <a:r>
+              <a:rPr sz="1200" b="0" i="1">
+                <a:solidFill>
+                  <a:srgbClr val="2B2B2B"/>
+                </a:solidFill>
+                <a:latin typeface="Calibri"/>
+              </a:rPr>
+              <a:t>Traigan el documento abierto y el pitch ensayado. Hoy se habla, no se lee.</a:t>
             </a:r>
           </a:p>
         </p:txBody>
@@ -7632,7 +8570,7 @@
 </p:sld>
 </file>
 
-<file path=ppt/slides/slide2.xml><?xml version="1.0" encoding="utf-8"?>
+<file path=ppt/slides/slide20.xml><?xml version="1.0" encoding="utf-8"?>
 <p:sld xmlns:a="http://schemas.openxmlformats.org/drawingml/2006/main" xmlns:p="http://schemas.openxmlformats.org/presentationml/2006/main" xmlns:r="http://schemas.openxmlformats.org/officeDocument/2006/relationships">
   <p:cSld>
     <p:bg>
@@ -7724,7 +8662,7 @@
                 </a:solidFill>
                 <a:latin typeface="Calibri"/>
               </a:rPr>
-              <a:t>Hoy no se entrega nada nuevo: hoy se sostiene lo que ya escribió</a:t>
+              <a:t>Cierre del curso · últimos pendientes (cont.)</a:t>
             </a:r>
           </a:p>
         </p:txBody>
@@ -7763,7 +8701,7 @@
                 </a:solidFill>
                 <a:latin typeface="Calibri"/>
               </a:rPr>
-              <a:t>–   La </a:t>
+              <a:t>–   Cualquier duda administrativa, por el canal del curso. </a:t>
             </a:r>
             <a:r>
               <a:rPr sz="1600" b="1" i="0">
@@ -7772,324 +8710,7 @@
                 </a:solidFill>
                 <a:latin typeface="Calibri"/>
               </a:rPr>
-              <a:t>ACA Final ya cerró</a:t>
-            </a:r>
-            <a:r>
-              <a:rPr sz="1600" b="0" i="0">
-                <a:solidFill>
-                  <a:srgbClr val="2B2B2B"/>
-                </a:solidFill>
-                <a:latin typeface="Calibri"/>
-              </a:rPr>
-              <a:t> y el </a:t>
-            </a:r>
-            <a:r>
-              <a:rPr sz="1600" b="1" i="0">
-                <a:solidFill>
-                  <a:srgbClr val="2B2B2B"/>
-                </a:solidFill>
-                <a:latin typeface="Calibri"/>
-              </a:rPr>
-              <a:t>Quiz 3</a:t>
-            </a:r>
-            <a:r>
-              <a:rPr sz="1600" b="0" i="0">
-                <a:solidFill>
-                  <a:srgbClr val="2B2B2B"/>
-                </a:solidFill>
-                <a:latin typeface="Calibri"/>
-              </a:rPr>
-              <a:t> también. Esta sesión </a:t>
-            </a:r>
-            <a:r>
-              <a:rPr sz="1600" b="1" i="0">
-                <a:solidFill>
-                  <a:srgbClr val="2B2B2B"/>
-                </a:solidFill>
-                <a:latin typeface="Calibri"/>
-              </a:rPr>
-              <a:t>no tiene evaluación de contenido nueva</a:t>
-            </a:r>
-            <a:r>
-              <a:rPr sz="1600" b="0" i="0">
-                <a:solidFill>
-                  <a:srgbClr val="2B2B2B"/>
-                </a:solidFill>
-                <a:latin typeface="Calibri"/>
-              </a:rPr>
-              <a:t>, y eso no la hace menos importante.</a:t>
-            </a:r>
-          </a:p>
-          <a:p>
-            <a:pPr>
-              <a:spcAft>
-                <a:spcPts val="1000"/>
-              </a:spcAft>
-            </a:pPr>
-            <a:r>
-              <a:rPr sz="1600" b="0" i="0">
-                <a:solidFill>
-                  <a:srgbClr val="2B2B2B"/>
-                </a:solidFill>
-                <a:latin typeface="Calibri"/>
-              </a:rPr>
-              <a:t>–   Lo que sí pasa hoy, en este orden:</a:t>
-            </a:r>
-          </a:p>
-          <a:p>
-            <a:pPr lvl="1">
-              <a:spcAft>
-                <a:spcPts val="600"/>
-              </a:spcAft>
-            </a:pPr>
-            <a:r>
-              <a:rPr sz="1500" b="0" i="0">
-                <a:solidFill>
-                  <a:srgbClr val="2B2B2B"/>
-                </a:solidFill>
-                <a:latin typeface="Calibri"/>
-              </a:rPr>
-              <a:t>●   </a:t>
-            </a:r>
-            <a:r>
-              <a:rPr sz="1500" b="1" i="0">
-                <a:solidFill>
-                  <a:srgbClr val="2B2B2B"/>
-                </a:solidFill>
-                <a:latin typeface="Calibri"/>
-              </a:rPr>
-              <a:t>Sustentación</a:t>
-            </a:r>
-            <a:r>
-              <a:rPr sz="1500" b="0" i="0">
-                <a:solidFill>
-                  <a:srgbClr val="2B2B2B"/>
-                </a:solidFill>
-                <a:latin typeface="Calibri"/>
-              </a:rPr>
-              <a:t> — cada quien defiende su propuesta con el </a:t>
-            </a:r>
-            <a:r>
-              <a:rPr sz="1500" b="1" i="0">
-                <a:solidFill>
-                  <a:srgbClr val="2B2B2B"/>
-                </a:solidFill>
-                <a:latin typeface="Calibri"/>
-              </a:rPr>
-              <a:t>pitch de 60 segundos</a:t>
-            </a:r>
-            <a:r>
-              <a:rPr sz="1500" b="0" i="0">
-                <a:solidFill>
-                  <a:srgbClr val="2B2B2B"/>
-                </a:solidFill>
-                <a:latin typeface="Calibri"/>
-              </a:rPr>
-              <a:t> y responde dos preguntas.</a:t>
-            </a:r>
-          </a:p>
-          <a:p>
-            <a:pPr lvl="1">
-              <a:spcAft>
-                <a:spcPts val="600"/>
-              </a:spcAft>
-            </a:pPr>
-            <a:r>
-              <a:rPr sz="1500" b="0" i="0">
-                <a:solidFill>
-                  <a:srgbClr val="2B2B2B"/>
-                </a:solidFill>
-                <a:latin typeface="Calibri"/>
-              </a:rPr>
-              <a:t>●   </a:t>
-            </a:r>
-            <a:r>
-              <a:rPr sz="1500" b="1" i="0">
-                <a:solidFill>
-                  <a:srgbClr val="2B2B2B"/>
-                </a:solidFill>
-                <a:latin typeface="Calibri"/>
-              </a:rPr>
-              <a:t>Retroalimentación entre pares</a:t>
-            </a:r>
-            <a:r>
-              <a:rPr sz="1500" b="0" i="0">
-                <a:solidFill>
-                  <a:srgbClr val="2B2B2B"/>
-                </a:solidFill>
-                <a:latin typeface="Calibri"/>
-              </a:rPr>
-              <a:t> — con una fórmula, no con "me gustó".</a:t>
-            </a:r>
-          </a:p>
-          <a:p>
-            <a:pPr lvl="1">
-              <a:spcAft>
-                <a:spcPts val="600"/>
-              </a:spcAft>
-            </a:pPr>
-            <a:r>
-              <a:rPr sz="1500" b="0" i="0">
-                <a:solidFill>
-                  <a:srgbClr val="2B2B2B"/>
-                </a:solidFill>
-                <a:latin typeface="Calibri"/>
-              </a:rPr>
-              <a:t>●   </a:t>
-            </a:r>
-            <a:r>
-              <a:rPr sz="1500" b="1" i="0">
-                <a:solidFill>
-                  <a:srgbClr val="2B2B2B"/>
-                </a:solidFill>
-                <a:latin typeface="Calibri"/>
-              </a:rPr>
-              <a:t>Consolidación</a:t>
-            </a:r>
-            <a:r>
-              <a:rPr sz="1500" b="0" i="0">
-                <a:solidFill>
-                  <a:srgbClr val="2B2B2B"/>
-                </a:solidFill>
-                <a:latin typeface="Calibri"/>
-              </a:rPr>
-              <a:t> — revisión de coherencia del documento: que las siete piezas hablen del mismo proyecto.</a:t>
-            </a:r>
-          </a:p>
-          <a:p>
-            <a:pPr lvl="1">
-              <a:spcAft>
-                <a:spcPts val="600"/>
-              </a:spcAft>
-            </a:pPr>
-            <a:r>
-              <a:rPr sz="1500" b="0" i="0">
-                <a:solidFill>
-                  <a:srgbClr val="2B2B2B"/>
-                </a:solidFill>
-                <a:latin typeface="Calibri"/>
-              </a:rPr>
-              <a:t>●   </a:t>
-            </a:r>
-            <a:r>
-              <a:rPr sz="1500" b="1" i="0">
-                <a:solidFill>
-                  <a:srgbClr val="2B2B2B"/>
-                </a:solidFill>
-                <a:latin typeface="Calibri"/>
-              </a:rPr>
-              <a:t>Cierre</a:t>
-            </a:r>
-            <a:r>
-              <a:rPr sz="1500" b="0" i="0">
-                <a:solidFill>
-                  <a:srgbClr val="2B2B2B"/>
-                </a:solidFill>
-                <a:latin typeface="Calibri"/>
-              </a:rPr>
-              <a:t> — </a:t>
-            </a:r>
-            <a:r>
-              <a:rPr sz="1500" b="1" i="0">
-                <a:solidFill>
-                  <a:srgbClr val="2B2B2B"/>
-                </a:solidFill>
-                <a:latin typeface="Calibri"/>
-              </a:rPr>
-              <a:t>autoevaluación</a:t>
-            </a:r>
-            <a:r>
-              <a:rPr sz="1500" b="0" i="0">
-                <a:solidFill>
-                  <a:srgbClr val="2B2B2B"/>
-                </a:solidFill>
-                <a:latin typeface="Calibri"/>
-              </a:rPr>
-              <a:t> y </a:t>
-            </a:r>
-            <a:r>
-              <a:rPr sz="1500" b="1" i="0">
-                <a:solidFill>
-                  <a:srgbClr val="2B2B2B"/>
-                </a:solidFill>
-                <a:latin typeface="Calibri"/>
-              </a:rPr>
-              <a:t>coevaluación</a:t>
-            </a:r>
-            <a:r>
-              <a:rPr sz="1500" b="0" i="0">
-                <a:solidFill>
-                  <a:srgbClr val="2B2B2B"/>
-                </a:solidFill>
-                <a:latin typeface="Calibri"/>
-              </a:rPr>
-              <a:t>, que se abren hoy en CDigital, y la ruta de lo que sigue.</a:t>
-            </a:r>
-          </a:p>
-          <a:p>
-            <a:pPr>
-              <a:spcAft>
-                <a:spcPts val="1000"/>
-              </a:spcAft>
-            </a:pPr>
-            <a:r>
-              <a:rPr sz="1600" b="0" i="0">
-                <a:solidFill>
-                  <a:srgbClr val="2B2B2B"/>
-                </a:solidFill>
-                <a:latin typeface="Calibri"/>
-              </a:rPr>
-              <a:t>–   Por qué sustentar después de entregar sirve, y mucho:</a:t>
-            </a:r>
-          </a:p>
-          <a:p>
-            <a:pPr lvl="1">
-              <a:spcAft>
-                <a:spcPts val="600"/>
-              </a:spcAft>
-            </a:pPr>
-            <a:r>
-              <a:rPr sz="1500" b="0" i="0">
-                <a:solidFill>
-                  <a:srgbClr val="2B2B2B"/>
-                </a:solidFill>
-                <a:latin typeface="Calibri"/>
-              </a:rPr>
-              <a:t>●   Lo que usted responda hoy </a:t>
-            </a:r>
-            <a:r>
-              <a:rPr sz="1500" b="1" i="0">
-                <a:solidFill>
-                  <a:srgbClr val="2B2B2B"/>
-                </a:solidFill>
-                <a:latin typeface="Calibri"/>
-              </a:rPr>
-              <a:t>no cambia la nota de la ACA</a:t>
-            </a:r>
-            <a:r>
-              <a:rPr sz="1500" b="0" i="0">
-                <a:solidFill>
-                  <a:srgbClr val="2B2B2B"/>
-                </a:solidFill>
-                <a:latin typeface="Calibri"/>
-              </a:rPr>
-              <a:t>, pero sí cambia el documento con el que va a golpear puertas después.</a:t>
-            </a:r>
-          </a:p>
-          <a:p>
-            <a:pPr lvl="1">
-              <a:spcAft>
-                <a:spcPts val="600"/>
-              </a:spcAft>
-            </a:pPr>
-            <a:r>
-              <a:rPr sz="1500" b="0" i="0">
-                <a:solidFill>
-                  <a:srgbClr val="2B2B2B"/>
-                </a:solidFill>
-                <a:latin typeface="Calibri"/>
-              </a:rPr>
-              <a:t>●   Y descubrir hoy que no sabe explicar su propia propuesta en un minuto es mejor que descubrirlo en una entrevista.</a:t>
+              <a:t>Gracias por el trabajo de todo el ciclo.</a:t>
             </a:r>
           </a:p>
         </p:txBody>
@@ -8124,41 +8745,7 @@
                 </a:solidFill>
                 <a:latin typeface="Calibri"/>
               </a:rPr>
-              <a:t>2</a:t>
-            </a:r>
-          </a:p>
-        </p:txBody>
-      </p:sp>
-      <p:sp>
-        <p:nvSpPr>
-          <p:cNvPr id="6" name="TextBox 5"/>
-          <p:cNvSpPr txBox="1"/>
-          <p:nvPr/>
-        </p:nvSpPr>
-        <p:spPr>
-          <a:xfrm>
-            <a:off x="640080" y="5943600"/>
-            <a:ext cx="9997135" cy="457200"/>
-          </a:xfrm>
-          <a:prstGeom prst="rect">
-            <a:avLst/>
-          </a:prstGeom>
-          <a:noFill/>
-        </p:spPr>
-        <p:txBody>
-          <a:bodyPr wrap="square" anchor="t" lIns="0" rIns="0" tIns="0" bIns="0">
-            <a:spAutoFit/>
-          </a:bodyPr>
-          <a:lstStyle/>
-          <a:p>
-            <a:r>
-              <a:rPr sz="1200" b="0" i="1">
-                <a:solidFill>
-                  <a:srgbClr val="2B2B2B"/>
-                </a:solidFill>
-                <a:latin typeface="Calibri"/>
-              </a:rPr>
-              <a:t>Traigan el documento abierto y el pitch ensayado. Hoy se habla, no se lee.</a:t>
+              <a:t>20</a:t>
             </a:r>
           </a:p>
         </p:txBody>
@@ -8171,7 +8758,1215 @@
 </p:sld>
 </file>
 
-<file path=ppt/slides/slide20.xml><?xml version="1.0" encoding="utf-8"?>
+<file path=ppt/slides/slide21.xml><?xml version="1.0" encoding="utf-8"?>
+<p:sld xmlns:a="http://schemas.openxmlformats.org/drawingml/2006/main" xmlns:p="http://schemas.openxmlformats.org/presentationml/2006/main" xmlns:r="http://schemas.openxmlformats.org/officeDocument/2006/relationships">
+  <p:cSld>
+    <p:bg>
+      <p:bgPr>
+        <a:solidFill>
+          <a:srgbClr val="FFFFFF"/>
+        </a:solidFill>
+        <a:effectLst/>
+      </p:bgPr>
+    </p:bg>
+    <p:spTree>
+      <p:nvGrpSpPr>
+        <p:cNvPr id="1" name=""/>
+        <p:cNvGrpSpPr/>
+        <p:nvPr/>
+      </p:nvGrpSpPr>
+      <p:grpSpPr/>
+      <p:sp>
+        <p:nvSpPr>
+          <p:cNvPr id="2" name="Rectangle 1"/>
+          <p:cNvSpPr/>
+          <p:nvPr/>
+        </p:nvSpPr>
+        <p:spPr>
+          <a:xfrm>
+            <a:off x="0" y="0"/>
+            <a:ext cx="12191695" cy="1188720"/>
+          </a:xfrm>
+          <a:prstGeom prst="rect">
+            <a:avLst/>
+          </a:prstGeom>
+          <a:solidFill>
+            <a:srgbClr val="0C2340"/>
+          </a:solidFill>
+          <a:ln>
+            <a:noFill/>
+          </a:ln>
+          <a:effectLst/>
+        </p:spPr>
+        <p:style>
+          <a:lnRef idx="1">
+            <a:schemeClr val="accent1"/>
+          </a:lnRef>
+          <a:fillRef idx="3">
+            <a:schemeClr val="accent1"/>
+          </a:fillRef>
+          <a:effectRef idx="2">
+            <a:schemeClr val="accent1"/>
+          </a:effectRef>
+          <a:fontRef idx="minor">
+            <a:schemeClr val="lt1"/>
+          </a:fontRef>
+        </p:style>
+        <p:txBody>
+          <a:bodyPr rtlCol="0" anchor="ctr"/>
+          <a:lstStyle/>
+          <a:p>
+            <a:pPr algn="ctr"/>
+          </a:p>
+        </p:txBody>
+      </p:sp>
+      <p:sp>
+        <p:nvSpPr>
+          <p:cNvPr id="3" name="TextBox 2"/>
+          <p:cNvSpPr txBox="1"/>
+          <p:nvPr/>
+        </p:nvSpPr>
+        <p:spPr>
+          <a:xfrm>
+            <a:off x="640080" y="0"/>
+            <a:ext cx="9082735" cy="1188720"/>
+          </a:xfrm>
+          <a:prstGeom prst="rect">
+            <a:avLst/>
+          </a:prstGeom>
+          <a:noFill/>
+        </p:spPr>
+        <p:txBody>
+          <a:bodyPr wrap="square" anchor="ctr" lIns="0" rIns="0" tIns="0" bIns="0">
+            <a:spAutoFit/>
+          </a:bodyPr>
+          <a:lstStyle/>
+          <a:p>
+            <a:pPr algn="ctr"/>
+            <a:r>
+              <a:rPr sz="2600" b="1" i="0">
+                <a:solidFill>
+                  <a:srgbClr val="FFFFFF"/>
+                </a:solidFill>
+                <a:latin typeface="Calibri"/>
+              </a:rPr>
+              <a:t>RUTA DE ENTREGABLES DEL CURSO</a:t>
+            </a:r>
+          </a:p>
+        </p:txBody>
+      </p:sp>
+      <p:sp>
+        <p:nvSpPr>
+          <p:cNvPr id="4" name="TextBox 3"/>
+          <p:cNvSpPr txBox="1"/>
+          <p:nvPr/>
+        </p:nvSpPr>
+        <p:spPr>
+          <a:xfrm>
+            <a:off x="640080" y="1280160"/>
+            <a:ext cx="10911535" cy="411480"/>
+          </a:xfrm>
+          <a:prstGeom prst="rect">
+            <a:avLst/>
+          </a:prstGeom>
+          <a:noFill/>
+        </p:spPr>
+        <p:txBody>
+          <a:bodyPr wrap="square" anchor="t" lIns="0" rIns="0" tIns="0" bIns="0">
+            <a:spAutoFit/>
+          </a:bodyPr>
+          <a:lstStyle/>
+          <a:p>
+            <a:pPr algn="ctr"/>
+            <a:r>
+              <a:rPr sz="1500" b="0" i="0">
+                <a:solidFill>
+                  <a:srgbClr val="2B2B2B"/>
+                </a:solidFill>
+                <a:latin typeface="Calibri"/>
+              </a:rPr>
+              <a:t>Sin fechas a propósito: aquí va </a:t>
+            </a:r>
+            <a:r>
+              <a:rPr sz="1500" b="1" i="0">
+                <a:solidFill>
+                  <a:srgbClr val="2B2B2B"/>
+                </a:solidFill>
+                <a:latin typeface="Calibri"/>
+              </a:rPr>
+              <a:t>en qué punto del curso</a:t>
+            </a:r>
+            <a:r>
+              <a:rPr sz="1500" b="0" i="0">
+                <a:solidFill>
+                  <a:srgbClr val="2B2B2B"/>
+                </a:solidFill>
+                <a:latin typeface="Calibri"/>
+              </a:rPr>
+              <a:t> cierra cada ítem · la ventana exacta la fija CDigital</a:t>
+            </a:r>
+          </a:p>
+        </p:txBody>
+      </p:sp>
+      <p:graphicFrame>
+        <p:nvGraphicFramePr>
+          <p:cNvPr id="5" name="Table 4"/>
+          <p:cNvGraphicFramePr>
+            <a:graphicFrameLocks noGrp="1"/>
+          </p:cNvGraphicFramePr>
+          <p:nvPr/>
+        </p:nvGraphicFramePr>
+        <p:xfrm>
+          <a:off x="640080" y="2011679"/>
+          <a:ext cx="10911533" cy="4297680"/>
+        </p:xfrm>
+        <a:graphic>
+          <a:graphicData uri="http://schemas.openxmlformats.org/drawingml/2006/table">
+            <a:tbl>
+              <a:tblPr>
+                <a:tableStyleId>{2D5ABB26-0587-4C30-8999-92F81FD0307C}</a:tableStyleId>
+              </a:tblPr>
+              <a:tblGrid>
+                <a:gridCol w="2659113"/>
+                <a:gridCol w="2659113"/>
+                <a:gridCol w="5593307"/>
+              </a:tblGrid>
+              <a:tr h="477520">
+                <a:tc>
+                  <a:txBody>
+                    <a:bodyPr/>
+                    <a:lstStyle/>
+                    <a:p>
+                      <a:pPr algn="l"/>
+                      <a:r>
+                        <a:rPr sz="1300" b="1" i="0">
+                          <a:solidFill>
+                            <a:srgbClr val="FFFFFF"/>
+                          </a:solidFill>
+                          <a:latin typeface="Calibri"/>
+                        </a:rPr>
+                        <a:t>Cierra en la semana de…</a:t>
+                      </a:r>
+                    </a:p>
+                  </a:txBody>
+                  <a:tcPr anchor="ctr" marL="109728" marR="91440" marT="36576" marB="36576">
+                    <a:solidFill>
+                      <a:srgbClr val="0C2340"/>
+                    </a:solidFill>
+                  </a:tcPr>
+                </a:tc>
+                <a:tc>
+                  <a:txBody>
+                    <a:bodyPr/>
+                    <a:lstStyle/>
+                    <a:p>
+                      <a:pPr algn="l"/>
+                      <a:r>
+                        <a:rPr sz="1300" b="1" i="0">
+                          <a:solidFill>
+                            <a:srgbClr val="FFFFFF"/>
+                          </a:solidFill>
+                          <a:latin typeface="Calibri"/>
+                        </a:rPr>
+                        <a:t>Entregable</a:t>
+                      </a:r>
+                    </a:p>
+                  </a:txBody>
+                  <a:tcPr anchor="ctr" marL="109728" marR="91440" marT="36576" marB="36576">
+                    <a:solidFill>
+                      <a:srgbClr val="0C2340"/>
+                    </a:solidFill>
+                  </a:tcPr>
+                </a:tc>
+                <a:tc>
+                  <a:txBody>
+                    <a:bodyPr/>
+                    <a:lstStyle/>
+                    <a:p>
+                      <a:pPr algn="l"/>
+                      <a:r>
+                        <a:rPr sz="1300" b="1" i="0">
+                          <a:solidFill>
+                            <a:srgbClr val="FFFFFF"/>
+                          </a:solidFill>
+                          <a:latin typeface="Calibri"/>
+                        </a:rPr>
+                        <a:t>Qué debes tener listo</a:t>
+                      </a:r>
+                    </a:p>
+                  </a:txBody>
+                  <a:tcPr anchor="ctr" marL="109728" marR="91440" marT="36576" marB="36576">
+                    <a:solidFill>
+                      <a:srgbClr val="0C2340"/>
+                    </a:solidFill>
+                  </a:tcPr>
+                </a:tc>
+              </a:tr>
+              <a:tr h="477520">
+                <a:tc>
+                  <a:txBody>
+                    <a:bodyPr/>
+                    <a:lstStyle/>
+                    <a:p>
+                      <a:pPr algn="l"/>
+                      <a:r>
+                        <a:rPr sz="1100" b="1" i="0">
+                          <a:solidFill>
+                            <a:srgbClr val="2B2B2B"/>
+                          </a:solidFill>
+                          <a:latin typeface="Calibri"/>
+                        </a:rPr>
+                        <a:t>Sesión 02</a:t>
+                      </a:r>
+                      <a:r>
+                        <a:rPr sz="1100" b="0" i="0">
+                          <a:solidFill>
+                            <a:srgbClr val="2B2B2B"/>
+                          </a:solidFill>
+                          <a:latin typeface="Calibri"/>
+                        </a:rPr>
+                        <a:t> · ya cerró</a:t>
+                      </a:r>
+                    </a:p>
+                  </a:txBody>
+                  <a:tcPr anchor="ctr" marL="109728" marR="91440" marT="36576" marB="36576">
+                    <a:solidFill>
+                      <a:srgbClr val="FFFFFF"/>
+                    </a:solidFill>
+                  </a:tcPr>
+                </a:tc>
+                <a:tc>
+                  <a:txBody>
+                    <a:bodyPr/>
+                    <a:lstStyle/>
+                    <a:p>
+                      <a:pPr algn="l"/>
+                      <a:r>
+                        <a:rPr sz="1100" b="1" i="0">
+                          <a:solidFill>
+                            <a:srgbClr val="2B2B2B"/>
+                          </a:solidFill>
+                          <a:latin typeface="Calibri"/>
+                        </a:rPr>
+                        <a:t>Quiz 1</a:t>
+                      </a:r>
+                      <a:r>
+                        <a:rPr sz="1100" b="0" i="0">
+                          <a:solidFill>
+                            <a:srgbClr val="2B2B2B"/>
+                          </a:solidFill>
+                          <a:latin typeface="Calibri"/>
+                        </a:rPr>
+                        <a:t> · Cuestionario · 6%</a:t>
+                      </a:r>
+                    </a:p>
+                  </a:txBody>
+                  <a:tcPr anchor="ctr" marL="109728" marR="91440" marT="36576" marB="36576">
+                    <a:solidFill>
+                      <a:srgbClr val="FFFFFF"/>
+                    </a:solidFill>
+                  </a:tcPr>
+                </a:tc>
+                <a:tc>
+                  <a:txBody>
+                    <a:bodyPr/>
+                    <a:lstStyle/>
+                    <a:p>
+                      <a:pPr algn="l"/>
+                      <a:r>
+                        <a:rPr sz="1100" b="0" i="0">
+                          <a:solidFill>
+                            <a:srgbClr val="2B2B2B"/>
+                          </a:solidFill>
+                          <a:latin typeface="Calibri"/>
+                        </a:rPr>
+                        <a:t>Ten leída la unidad del encuadre: </a:t>
+                      </a:r>
+                      <a:r>
+                        <a:rPr sz="1100" b="1" i="0">
+                          <a:solidFill>
+                            <a:srgbClr val="2B2B2B"/>
+                          </a:solidFill>
+                          <a:latin typeface="Calibri"/>
+                        </a:rPr>
+                        <a:t>Propuesta de Innovación</a:t>
+                      </a:r>
+                      <a:r>
+                        <a:rPr sz="1100" b="0" i="0">
+                          <a:solidFill>
+                            <a:srgbClr val="2B2B2B"/>
+                          </a:solidFill>
+                          <a:latin typeface="Calibri"/>
+                        </a:rPr>
+                        <a:t> e inteligencia emocional.</a:t>
+                      </a:r>
+                    </a:p>
+                  </a:txBody>
+                  <a:tcPr anchor="ctr" marL="109728" marR="91440" marT="36576" marB="36576">
+                    <a:solidFill>
+                      <a:srgbClr val="FFFFFF"/>
+                    </a:solidFill>
+                  </a:tcPr>
+                </a:tc>
+              </a:tr>
+              <a:tr h="477520">
+                <a:tc>
+                  <a:txBody>
+                    <a:bodyPr/>
+                    <a:lstStyle/>
+                    <a:p>
+                      <a:pPr algn="l"/>
+                      <a:r>
+                        <a:rPr sz="1100" b="1" i="0">
+                          <a:solidFill>
+                            <a:srgbClr val="2B2B2B"/>
+                          </a:solidFill>
+                          <a:latin typeface="Calibri"/>
+                        </a:rPr>
+                        <a:t>Sesión 03</a:t>
+                      </a:r>
+                      <a:r>
+                        <a:rPr sz="1100" b="0" i="0">
+                          <a:solidFill>
+                            <a:srgbClr val="2B2B2B"/>
+                          </a:solidFill>
+                          <a:latin typeface="Calibri"/>
+                        </a:rPr>
+                        <a:t> · ya cerró</a:t>
+                      </a:r>
+                    </a:p>
+                  </a:txBody>
+                  <a:tcPr anchor="ctr" marL="109728" marR="91440" marT="36576" marB="36576">
+                    <a:solidFill>
+                      <a:srgbClr val="F2F2F2"/>
+                    </a:solidFill>
+                  </a:tcPr>
+                </a:tc>
+                <a:tc>
+                  <a:txBody>
+                    <a:bodyPr/>
+                    <a:lstStyle/>
+                    <a:p>
+                      <a:pPr algn="l"/>
+                      <a:r>
+                        <a:rPr sz="1100" b="1" i="0">
+                          <a:solidFill>
+                            <a:srgbClr val="2B2B2B"/>
+                          </a:solidFill>
+                          <a:latin typeface="Calibri"/>
+                        </a:rPr>
+                        <a:t>Parcial 1</a:t>
+                      </a:r>
+                      <a:r>
+                        <a:rPr sz="1100" b="0" i="0">
+                          <a:solidFill>
+                            <a:srgbClr val="2B2B2B"/>
+                          </a:solidFill>
+                          <a:latin typeface="Calibri"/>
+                        </a:rPr>
+                        <a:t> · Cuestionario · 24%</a:t>
+                      </a:r>
+                    </a:p>
+                  </a:txBody>
+                  <a:tcPr anchor="ctr" marL="109728" marR="91440" marT="36576" marB="36576">
+                    <a:solidFill>
+                      <a:srgbClr val="F2F2F2"/>
+                    </a:solidFill>
+                  </a:tcPr>
+                </a:tc>
+                <a:tc>
+                  <a:txBody>
+                    <a:bodyPr/>
+                    <a:lstStyle/>
+                    <a:p>
+                      <a:pPr algn="l"/>
+                      <a:r>
+                        <a:rPr sz="1100" b="0" i="0">
+                          <a:solidFill>
+                            <a:srgbClr val="2B2B2B"/>
+                          </a:solidFill>
+                          <a:latin typeface="Calibri"/>
+                        </a:rPr>
+                        <a:t>Domina </a:t>
+                      </a:r>
+                      <a:r>
+                        <a:rPr sz="1100" b="1" i="0">
+                          <a:solidFill>
+                            <a:srgbClr val="2B2B2B"/>
+                          </a:solidFill>
+                          <a:latin typeface="Calibri"/>
+                        </a:rPr>
+                        <a:t>Design Thinking</a:t>
+                      </a:r>
+                      <a:r>
+                        <a:rPr sz="1100" b="0" i="0">
+                          <a:solidFill>
+                            <a:srgbClr val="2B2B2B"/>
+                          </a:solidFill>
+                          <a:latin typeface="Calibri"/>
+                        </a:rPr>
+                        <a:t>, dos técnicas de ideación, bloqueadores y ensanchadores.</a:t>
+                      </a:r>
+                    </a:p>
+                  </a:txBody>
+                  <a:tcPr anchor="ctr" marL="109728" marR="91440" marT="36576" marB="36576">
+                    <a:solidFill>
+                      <a:srgbClr val="F2F2F2"/>
+                    </a:solidFill>
+                  </a:tcPr>
+                </a:tc>
+              </a:tr>
+              <a:tr h="477520">
+                <a:tc>
+                  <a:txBody>
+                    <a:bodyPr/>
+                    <a:lstStyle/>
+                    <a:p>
+                      <a:pPr algn="l"/>
+                      <a:r>
+                        <a:rPr sz="1100" b="1" i="0">
+                          <a:solidFill>
+                            <a:srgbClr val="2B2B2B"/>
+                          </a:solidFill>
+                          <a:latin typeface="Calibri"/>
+                        </a:rPr>
+                        <a:t>Sesión 04</a:t>
+                      </a:r>
+                      <a:r>
+                        <a:rPr sz="1100" b="0" i="0">
+                          <a:solidFill>
+                            <a:srgbClr val="2B2B2B"/>
+                          </a:solidFill>
+                          <a:latin typeface="Calibri"/>
+                        </a:rPr>
+                        <a:t> · ya cerró</a:t>
+                      </a:r>
+                    </a:p>
+                  </a:txBody>
+                  <a:tcPr anchor="ctr" marL="109728" marR="91440" marT="36576" marB="36576">
+                    <a:solidFill>
+                      <a:srgbClr val="FFFFFF"/>
+                    </a:solidFill>
+                  </a:tcPr>
+                </a:tc>
+                <a:tc>
+                  <a:txBody>
+                    <a:bodyPr/>
+                    <a:lstStyle/>
+                    <a:p>
+                      <a:pPr algn="l"/>
+                      <a:r>
+                        <a:rPr sz="1100" b="1" i="0">
+                          <a:solidFill>
+                            <a:srgbClr val="2B2B2B"/>
+                          </a:solidFill>
+                          <a:latin typeface="Calibri"/>
+                        </a:rPr>
+                        <a:t>Quiz 2</a:t>
+                      </a:r>
+                      <a:r>
+                        <a:rPr sz="1100" b="0" i="0">
+                          <a:solidFill>
+                            <a:srgbClr val="2B2B2B"/>
+                          </a:solidFill>
+                          <a:latin typeface="Calibri"/>
+                        </a:rPr>
+                        <a:t> · Cuestionario · 9%</a:t>
+                      </a:r>
+                    </a:p>
+                  </a:txBody>
+                  <a:tcPr anchor="ctr" marL="109728" marR="91440" marT="36576" marB="36576">
+                    <a:solidFill>
+                      <a:srgbClr val="FFFFFF"/>
+                    </a:solidFill>
+                  </a:tcPr>
+                </a:tc>
+                <a:tc>
+                  <a:txBody>
+                    <a:bodyPr/>
+                    <a:lstStyle/>
+                    <a:p>
+                      <a:pPr algn="l"/>
+                      <a:r>
+                        <a:rPr sz="1100" b="0" i="0">
+                          <a:solidFill>
+                            <a:srgbClr val="2B2B2B"/>
+                          </a:solidFill>
+                          <a:latin typeface="Calibri"/>
+                        </a:rPr>
+                        <a:t>Suma el </a:t>
+                      </a:r>
+                      <a:r>
+                        <a:rPr sz="1100" b="1" i="0">
+                          <a:solidFill>
+                            <a:srgbClr val="2B2B2B"/>
+                          </a:solidFill>
+                          <a:latin typeface="Calibri"/>
+                        </a:rPr>
+                        <a:t>Manual de Oslo</a:t>
+                      </a:r>
+                      <a:r>
+                        <a:rPr sz="1100" b="0" i="0">
+                          <a:solidFill>
+                            <a:srgbClr val="2B2B2B"/>
+                          </a:solidFill>
+                          <a:latin typeface="Calibri"/>
+                        </a:rPr>
+                        <a:t>: qué cuenta como innovación y cómo se gestiona; el curso acumula.</a:t>
+                      </a:r>
+                    </a:p>
+                  </a:txBody>
+                  <a:tcPr anchor="ctr" marL="109728" marR="91440" marT="36576" marB="36576">
+                    <a:solidFill>
+                      <a:srgbClr val="FFFFFF"/>
+                    </a:solidFill>
+                  </a:tcPr>
+                </a:tc>
+              </a:tr>
+              <a:tr h="477520">
+                <a:tc>
+                  <a:txBody>
+                    <a:bodyPr/>
+                    <a:lstStyle/>
+                    <a:p>
+                      <a:pPr algn="l"/>
+                      <a:r>
+                        <a:rPr sz="1100" b="1" i="0">
+                          <a:solidFill>
+                            <a:srgbClr val="2B2B2B"/>
+                          </a:solidFill>
+                          <a:latin typeface="Calibri"/>
+                        </a:rPr>
+                        <a:t>Sesión 05</a:t>
+                      </a:r>
+                      <a:r>
+                        <a:rPr sz="1100" b="0" i="0">
+                          <a:solidFill>
+                            <a:srgbClr val="2B2B2B"/>
+                          </a:solidFill>
+                          <a:latin typeface="Calibri"/>
+                        </a:rPr>
+                        <a:t> · ya cerró</a:t>
+                      </a:r>
+                    </a:p>
+                  </a:txBody>
+                  <a:tcPr anchor="ctr" marL="109728" marR="91440" marT="36576" marB="36576">
+                    <a:solidFill>
+                      <a:srgbClr val="F2F2F2"/>
+                    </a:solidFill>
+                  </a:tcPr>
+                </a:tc>
+                <a:tc>
+                  <a:txBody>
+                    <a:bodyPr/>
+                    <a:lstStyle/>
+                    <a:p>
+                      <a:pPr algn="l"/>
+                      <a:r>
+                        <a:rPr sz="1100" b="1" i="0">
+                          <a:solidFill>
+                            <a:srgbClr val="2B2B2B"/>
+                          </a:solidFill>
+                          <a:latin typeface="Calibri"/>
+                        </a:rPr>
+                        <a:t>Parcial 2</a:t>
+                      </a:r>
+                      <a:r>
+                        <a:rPr sz="1100" b="0" i="0">
+                          <a:solidFill>
+                            <a:srgbClr val="2B2B2B"/>
+                          </a:solidFill>
+                          <a:latin typeface="Calibri"/>
+                        </a:rPr>
+                        <a:t> · Cuestionario · 21%</a:t>
+                      </a:r>
+                    </a:p>
+                  </a:txBody>
+                  <a:tcPr anchor="ctr" marL="109728" marR="91440" marT="36576" marB="36576">
+                    <a:solidFill>
+                      <a:srgbClr val="F2F2F2"/>
+                    </a:solidFill>
+                  </a:tcPr>
+                </a:tc>
+                <a:tc>
+                  <a:txBody>
+                    <a:bodyPr/>
+                    <a:lstStyle/>
+                    <a:p>
+                      <a:pPr algn="l"/>
+                      <a:r>
+                        <a:rPr sz="1100" b="0" i="0">
+                          <a:solidFill>
+                            <a:srgbClr val="2B2B2B"/>
+                          </a:solidFill>
+                          <a:latin typeface="Calibri"/>
+                        </a:rPr>
+                        <a:t>Tipifica tu innovación (producto, proceso, organización, marketing, social) y </a:t>
+                      </a:r>
+                      <a:r>
+                        <a:rPr sz="1100" b="1" i="0">
+                          <a:solidFill>
+                            <a:srgbClr val="2B2B2B"/>
+                          </a:solidFill>
+                          <a:latin typeface="Calibri"/>
+                        </a:rPr>
+                        <a:t>justifícala</a:t>
+                      </a:r>
+                      <a:r>
+                        <a:rPr sz="1100" b="0" i="0">
+                          <a:solidFill>
+                            <a:srgbClr val="2B2B2B"/>
+                          </a:solidFill>
+                          <a:latin typeface="Calibri"/>
+                        </a:rPr>
+                        <a:t>.</a:t>
+                      </a:r>
+                    </a:p>
+                  </a:txBody>
+                  <a:tcPr anchor="ctr" marL="109728" marR="91440" marT="36576" marB="36576">
+                    <a:solidFill>
+                      <a:srgbClr val="F2F2F2"/>
+                    </a:solidFill>
+                  </a:tcPr>
+                </a:tc>
+              </a:tr>
+              <a:tr h="477520">
+                <a:tc>
+                  <a:txBody>
+                    <a:bodyPr/>
+                    <a:lstStyle/>
+                    <a:p>
+                      <a:pPr algn="l"/>
+                      <a:r>
+                        <a:rPr sz="1100" b="1" i="0">
+                          <a:solidFill>
+                            <a:srgbClr val="2B2B2B"/>
+                          </a:solidFill>
+                          <a:latin typeface="Calibri"/>
+                        </a:rPr>
+                        <a:t>Sesión 06</a:t>
+                      </a:r>
+                      <a:r>
+                        <a:rPr sz="1100" b="0" i="0">
+                          <a:solidFill>
+                            <a:srgbClr val="2B2B2B"/>
+                          </a:solidFill>
+                          <a:latin typeface="Calibri"/>
+                        </a:rPr>
+                        <a:t> · ya cerró</a:t>
+                      </a:r>
+                    </a:p>
+                  </a:txBody>
+                  <a:tcPr anchor="ctr" marL="109728" marR="91440" marT="36576" marB="36576">
+                    <a:solidFill>
+                      <a:srgbClr val="FFFFFF"/>
+                    </a:solidFill>
+                  </a:tcPr>
+                </a:tc>
+                <a:tc>
+                  <a:txBody>
+                    <a:bodyPr/>
+                    <a:lstStyle/>
+                    <a:p>
+                      <a:pPr algn="l"/>
+                      <a:r>
+                        <a:rPr sz="1100" b="1" i="0">
+                          <a:solidFill>
+                            <a:srgbClr val="2B2B2B"/>
+                          </a:solidFill>
+                          <a:latin typeface="Calibri"/>
+                        </a:rPr>
+                        <a:t>ACA Final</a:t>
+                      </a:r>
+                      <a:r>
+                        <a:rPr sz="1100" b="0" i="0">
+                          <a:solidFill>
+                            <a:srgbClr val="2B2B2B"/>
+                          </a:solidFill>
+                          <a:latin typeface="Calibri"/>
+                        </a:rPr>
+                        <a:t> · Tarea · 32,8%</a:t>
+                      </a:r>
+                    </a:p>
+                  </a:txBody>
+                  <a:tcPr anchor="ctr" marL="109728" marR="91440" marT="36576" marB="36576">
+                    <a:solidFill>
+                      <a:srgbClr val="FFFFFF"/>
+                    </a:solidFill>
+                  </a:tcPr>
+                </a:tc>
+                <a:tc>
+                  <a:txBody>
+                    <a:bodyPr/>
+                    <a:lstStyle/>
+                    <a:p>
+                      <a:pPr algn="l"/>
+                      <a:r>
+                        <a:rPr sz="1100" b="0" i="0">
+                          <a:solidFill>
+                            <a:srgbClr val="2B2B2B"/>
+                          </a:solidFill>
+                          <a:latin typeface="Calibri"/>
+                        </a:rPr>
+                        <a:t>Sube la </a:t>
+                      </a:r>
+                      <a:r>
+                        <a:rPr sz="1100" b="1" i="0">
+                          <a:solidFill>
+                            <a:srgbClr val="2B2B2B"/>
+                          </a:solidFill>
+                          <a:latin typeface="Calibri"/>
+                        </a:rPr>
+                        <a:t>propuesta consolidada</a:t>
+                      </a:r>
+                      <a:r>
+                        <a:rPr sz="1100" b="0" i="0">
+                          <a:solidFill>
+                            <a:srgbClr val="2B2B2B"/>
+                          </a:solidFill>
+                          <a:latin typeface="Calibri"/>
+                        </a:rPr>
+                        <a:t>: problema, tipo Oslo, FODA, Canvas, MVP, vigilancia y pitch.</a:t>
+                      </a:r>
+                    </a:p>
+                  </a:txBody>
+                  <a:tcPr anchor="ctr" marL="109728" marR="91440" marT="36576" marB="36576">
+                    <a:solidFill>
+                      <a:srgbClr val="FFFFFF"/>
+                    </a:solidFill>
+                  </a:tcPr>
+                </a:tc>
+              </a:tr>
+              <a:tr h="477520">
+                <a:tc>
+                  <a:txBody>
+                    <a:bodyPr/>
+                    <a:lstStyle/>
+                    <a:p>
+                      <a:pPr algn="l"/>
+                      <a:r>
+                        <a:rPr sz="1100" b="1" i="0">
+                          <a:solidFill>
+                            <a:srgbClr val="2B2B2B"/>
+                          </a:solidFill>
+                          <a:latin typeface="Calibri"/>
+                        </a:rPr>
+                        <a:t>Sesión 06</a:t>
+                      </a:r>
+                      <a:r>
+                        <a:rPr sz="1100" b="0" i="0">
+                          <a:solidFill>
+                            <a:srgbClr val="2B2B2B"/>
+                          </a:solidFill>
+                          <a:latin typeface="Calibri"/>
+                        </a:rPr>
+                        <a:t> · ya cerró</a:t>
+                      </a:r>
+                    </a:p>
+                  </a:txBody>
+                  <a:tcPr anchor="ctr" marL="109728" marR="91440" marT="36576" marB="36576">
+                    <a:solidFill>
+                      <a:srgbClr val="F2F2F2"/>
+                    </a:solidFill>
+                  </a:tcPr>
+                </a:tc>
+                <a:tc>
+                  <a:txBody>
+                    <a:bodyPr/>
+                    <a:lstStyle/>
+                    <a:p>
+                      <a:pPr algn="l"/>
+                      <a:r>
+                        <a:rPr sz="1100" b="1" i="0">
+                          <a:solidFill>
+                            <a:srgbClr val="2B2B2B"/>
+                          </a:solidFill>
+                          <a:latin typeface="Calibri"/>
+                        </a:rPr>
+                        <a:t>Quiz 3</a:t>
+                      </a:r>
+                      <a:r>
+                        <a:rPr sz="1100" b="0" i="0">
+                          <a:solidFill>
+                            <a:srgbClr val="2B2B2B"/>
+                          </a:solidFill>
+                          <a:latin typeface="Calibri"/>
+                        </a:rPr>
+                        <a:t> · Cuestionario · 4%</a:t>
+                      </a:r>
+                    </a:p>
+                  </a:txBody>
+                  <a:tcPr anchor="ctr" marL="109728" marR="91440" marT="36576" marB="36576">
+                    <a:solidFill>
+                      <a:srgbClr val="F2F2F2"/>
+                    </a:solidFill>
+                  </a:tcPr>
+                </a:tc>
+                <a:tc>
+                  <a:txBody>
+                    <a:bodyPr/>
+                    <a:lstStyle/>
+                    <a:p>
+                      <a:pPr algn="l"/>
+                      <a:r>
+                        <a:rPr sz="1100" b="0" i="0">
+                          <a:solidFill>
+                            <a:srgbClr val="2B2B2B"/>
+                          </a:solidFill>
+                          <a:latin typeface="Calibri"/>
+                        </a:rPr>
+                        <a:t>Ten claros </a:t>
+                      </a:r>
+                      <a:r>
+                        <a:rPr sz="1100" b="1" i="0">
+                          <a:solidFill>
+                            <a:srgbClr val="2B2B2B"/>
+                          </a:solidFill>
+                          <a:latin typeface="Calibri"/>
+                        </a:rPr>
+                        <a:t>FODA, Canvas y MVP</a:t>
+                      </a:r>
+                      <a:r>
+                        <a:rPr sz="1100" b="0" i="0">
+                          <a:solidFill>
+                            <a:srgbClr val="2B2B2B"/>
+                          </a:solidFill>
+                          <a:latin typeface="Calibri"/>
+                        </a:rPr>
+                        <a:t> (verificable) y para qué sirve la vigilancia tecnológica.</a:t>
+                      </a:r>
+                    </a:p>
+                  </a:txBody>
+                  <a:tcPr anchor="ctr" marL="109728" marR="91440" marT="36576" marB="36576">
+                    <a:solidFill>
+                      <a:srgbClr val="F2F2F2"/>
+                    </a:solidFill>
+                  </a:tcPr>
+                </a:tc>
+              </a:tr>
+              <a:tr h="477520">
+                <a:tc>
+                  <a:txBody>
+                    <a:bodyPr/>
+                    <a:lstStyle/>
+                    <a:p>
+                      <a:pPr algn="l"/>
+                      <a:r>
+                        <a:rPr sz="1100" b="1" i="0">
+                          <a:solidFill>
+                            <a:srgbClr val="2B2B2B"/>
+                          </a:solidFill>
+                          <a:latin typeface="Calibri"/>
+                        </a:rPr>
+                        <a:t>Sesión 07</a:t>
+                      </a:r>
+                      <a:r>
+                        <a:rPr sz="1100" b="0" i="0">
+                          <a:solidFill>
+                            <a:srgbClr val="2B2B2B"/>
+                          </a:solidFill>
+                          <a:latin typeface="Calibri"/>
+                        </a:rPr>
+                        <a:t> · cierra esta semana</a:t>
+                      </a:r>
+                    </a:p>
+                  </a:txBody>
+                  <a:tcPr anchor="ctr" marL="109728" marR="91440" marT="36576" marB="36576">
+                    <a:solidFill>
+                      <a:srgbClr val="FFFFFF"/>
+                    </a:solidFill>
+                  </a:tcPr>
+                </a:tc>
+                <a:tc>
+                  <a:txBody>
+                    <a:bodyPr/>
+                    <a:lstStyle/>
+                    <a:p>
+                      <a:pPr algn="l"/>
+                      <a:r>
+                        <a:rPr sz="1100" b="1" i="0">
+                          <a:solidFill>
+                            <a:srgbClr val="2B2B2B"/>
+                          </a:solidFill>
+                          <a:latin typeface="Calibri"/>
+                        </a:rPr>
+                        <a:t>Autoevaluación</a:t>
+                      </a:r>
+                      <a:r>
+                        <a:rPr sz="1100" b="0" i="0">
+                          <a:solidFill>
+                            <a:srgbClr val="2B2B2B"/>
+                          </a:solidFill>
+                          <a:latin typeface="Calibri"/>
+                        </a:rPr>
+                        <a:t> · Cuestionario · 1,6%</a:t>
+                      </a:r>
+                    </a:p>
+                  </a:txBody>
+                  <a:tcPr anchor="ctr" marL="109728" marR="91440" marT="36576" marB="36576">
+                    <a:solidFill>
+                      <a:srgbClr val="FFFFFF"/>
+                    </a:solidFill>
+                  </a:tcPr>
+                </a:tc>
+                <a:tc>
+                  <a:txBody>
+                    <a:bodyPr/>
+                    <a:lstStyle/>
+                    <a:p>
+                      <a:pPr algn="l"/>
+                      <a:r>
+                        <a:rPr sz="1100" b="0" i="0">
+                          <a:solidFill>
+                            <a:srgbClr val="2B2B2B"/>
+                          </a:solidFill>
+                          <a:latin typeface="Calibri"/>
+                        </a:rPr>
+                        <a:t>Diligénciala tú, y solo tú, </a:t>
+                      </a:r>
+                      <a:r>
+                        <a:rPr sz="1100" b="1" i="0">
+                          <a:solidFill>
+                            <a:srgbClr val="2B2B2B"/>
+                          </a:solidFill>
+                          <a:latin typeface="Calibri"/>
+                        </a:rPr>
+                        <a:t>con honestidad</a:t>
+                      </a:r>
+                      <a:r>
+                        <a:rPr sz="1100" b="0" i="0">
+                          <a:solidFill>
+                            <a:srgbClr val="2B2B2B"/>
+                          </a:solidFill>
+                          <a:latin typeface="Calibri"/>
+                        </a:rPr>
+                        <a:t> sobre tu participación real.</a:t>
+                      </a:r>
+                    </a:p>
+                  </a:txBody>
+                  <a:tcPr anchor="ctr" marL="109728" marR="91440" marT="36576" marB="36576">
+                    <a:solidFill>
+                      <a:srgbClr val="FFFFFF"/>
+                    </a:solidFill>
+                  </a:tcPr>
+                </a:tc>
+              </a:tr>
+              <a:tr h="477520">
+                <a:tc>
+                  <a:txBody>
+                    <a:bodyPr/>
+                    <a:lstStyle/>
+                    <a:p>
+                      <a:pPr algn="l"/>
+                      <a:r>
+                        <a:rPr sz="1100" b="1" i="0">
+                          <a:solidFill>
+                            <a:srgbClr val="2B2B2B"/>
+                          </a:solidFill>
+                          <a:latin typeface="Calibri"/>
+                        </a:rPr>
+                        <a:t>Sesión 07</a:t>
+                      </a:r>
+                      <a:r>
+                        <a:rPr sz="1100" b="0" i="0">
+                          <a:solidFill>
+                            <a:srgbClr val="2B2B2B"/>
+                          </a:solidFill>
+                          <a:latin typeface="Calibri"/>
+                        </a:rPr>
+                        <a:t> · cierra esta semana</a:t>
+                      </a:r>
+                    </a:p>
+                  </a:txBody>
+                  <a:tcPr anchor="ctr" marL="109728" marR="91440" marT="36576" marB="36576">
+                    <a:solidFill>
+                      <a:srgbClr val="F2F2F2"/>
+                    </a:solidFill>
+                  </a:tcPr>
+                </a:tc>
+                <a:tc>
+                  <a:txBody>
+                    <a:bodyPr/>
+                    <a:lstStyle/>
+                    <a:p>
+                      <a:pPr algn="l"/>
+                      <a:r>
+                        <a:rPr sz="1100" b="1" i="0">
+                          <a:solidFill>
+                            <a:srgbClr val="2B2B2B"/>
+                          </a:solidFill>
+                          <a:latin typeface="Calibri"/>
+                        </a:rPr>
+                        <a:t>Coevaluación</a:t>
+                      </a:r>
+                      <a:r>
+                        <a:rPr sz="1100" b="0" i="0">
+                          <a:solidFill>
+                            <a:srgbClr val="2B2B2B"/>
+                          </a:solidFill>
+                          <a:latin typeface="Calibri"/>
+                        </a:rPr>
+                        <a:t> · Foro · 1,6%</a:t>
+                      </a:r>
+                    </a:p>
+                  </a:txBody>
+                  <a:tcPr anchor="ctr" marL="109728" marR="91440" marT="36576" marB="36576">
+                    <a:solidFill>
+                      <a:srgbClr val="F2F2F2"/>
+                    </a:solidFill>
+                  </a:tcPr>
+                </a:tc>
+                <a:tc>
+                  <a:txBody>
+                    <a:bodyPr/>
+                    <a:lstStyle/>
+                    <a:p>
+                      <a:pPr algn="l"/>
+                      <a:r>
+                        <a:rPr sz="1100" b="1" i="0">
+                          <a:solidFill>
+                            <a:srgbClr val="2B2B2B"/>
+                          </a:solidFill>
+                          <a:latin typeface="Calibri"/>
+                        </a:rPr>
+                        <a:t>Publica</a:t>
+                      </a:r>
+                      <a:r>
+                        <a:rPr sz="1100" b="0" i="0">
+                          <a:solidFill>
+                            <a:srgbClr val="2B2B2B"/>
+                          </a:solidFill>
+                          <a:latin typeface="Calibri"/>
+                        </a:rPr>
+                        <a:t> tu aporte: valora hechos del trabajo en equipo, no a las personas.</a:t>
+                      </a:r>
+                    </a:p>
+                  </a:txBody>
+                  <a:tcPr anchor="ctr" marL="109728" marR="91440" marT="36576" marB="36576">
+                    <a:solidFill>
+                      <a:srgbClr val="F2F2F2"/>
+                    </a:solidFill>
+                  </a:tcPr>
+                </a:tc>
+              </a:tr>
+            </a:tbl>
+          </a:graphicData>
+        </a:graphic>
+      </p:graphicFrame>
+      <p:sp>
+        <p:nvSpPr>
+          <p:cNvPr id="6" name="TextBox 5"/>
+          <p:cNvSpPr txBox="1"/>
+          <p:nvPr/>
+        </p:nvSpPr>
+        <p:spPr>
+          <a:xfrm>
+            <a:off x="640080" y="6080760"/>
+            <a:ext cx="10911535" cy="548640"/>
+          </a:xfrm>
+          <a:prstGeom prst="rect">
+            <a:avLst/>
+          </a:prstGeom>
+          <a:noFill/>
+        </p:spPr>
+        <p:txBody>
+          <a:bodyPr wrap="square" anchor="t" lIns="0" rIns="0" tIns="0" bIns="0">
+            <a:spAutoFit/>
+          </a:bodyPr>
+          <a:lstStyle/>
+          <a:p>
+            <a:r>
+              <a:rPr sz="1200" b="0" i="1">
+                <a:solidFill>
+                  <a:srgbClr val="2B2B2B"/>
+                </a:solidFill>
+                <a:latin typeface="Calibri"/>
+              </a:rPr>
+              <a:t>Esta misma tabla va al final de todas las sesiones. La </a:t>
+            </a:r>
+            <a:r>
+              <a:rPr sz="1200" b="1" i="1">
+                <a:solidFill>
+                  <a:srgbClr val="2B2B2B"/>
+                </a:solidFill>
+                <a:latin typeface="Calibri"/>
+              </a:rPr>
+              <a:t>fecha</a:t>
+            </a:r>
+            <a:r>
+              <a:rPr sz="1200" b="0" i="1">
+                <a:solidFill>
+                  <a:srgbClr val="2B2B2B"/>
+                </a:solidFill>
+                <a:latin typeface="Calibri"/>
+              </a:rPr>
+              <a:t> de cada ventana está en el enunciado del ítem (`Clases/Recursos/ACAs/`) y en el aula: si el aula y cualquier otro material se contradicen, </a:t>
+            </a:r>
+            <a:r>
+              <a:rPr sz="1200" b="1" i="1">
+                <a:solidFill>
+                  <a:srgbClr val="2B2B2B"/>
+                </a:solidFill>
+                <a:latin typeface="Calibri"/>
+              </a:rPr>
+              <a:t>manda el aula</a:t>
+            </a:r>
+            <a:r>
+              <a:rPr sz="1200" b="0" i="1">
+                <a:solidFill>
+                  <a:srgbClr val="2B2B2B"/>
+                </a:solidFill>
+                <a:latin typeface="Calibri"/>
+              </a:rPr>
+              <a:t>.</a:t>
+            </a:r>
+          </a:p>
+        </p:txBody>
+      </p:sp>
+      <p:sp>
+        <p:nvSpPr>
+          <p:cNvPr id="7" name="TextBox 6"/>
+          <p:cNvSpPr txBox="1"/>
+          <p:nvPr/>
+        </p:nvSpPr>
+        <p:spPr>
+          <a:xfrm>
+            <a:off x="11094415" y="6446520"/>
+            <a:ext cx="548640" cy="274320"/>
+          </a:xfrm>
+          <a:prstGeom prst="rect">
+            <a:avLst/>
+          </a:prstGeom>
+          <a:noFill/>
+        </p:spPr>
+        <p:txBody>
+          <a:bodyPr wrap="square" anchor="t" lIns="0" rIns="0" tIns="0" bIns="0">
+            <a:spAutoFit/>
+          </a:bodyPr>
+          <a:lstStyle/>
+          <a:p>
+            <a:pPr algn="r"/>
+            <a:r>
+              <a:rPr sz="1000" b="1" i="0">
+                <a:solidFill>
+                  <a:srgbClr val="8F989D"/>
+                </a:solidFill>
+                <a:latin typeface="Calibri"/>
+              </a:rPr>
+              <a:t>21</a:t>
+            </a:r>
+          </a:p>
+        </p:txBody>
+      </p:sp>
+    </p:spTree>
+  </p:cSld>
+  <p:clrMapOvr>
+    <a:masterClrMapping/>
+  </p:clrMapOvr>
+</p:sld>
+</file>
+
+<file path=ppt/slides/slide22.xml><?xml version="1.0" encoding="utf-8"?>
 <p:sld xmlns:a="http://schemas.openxmlformats.org/drawingml/2006/main" xmlns:p="http://schemas.openxmlformats.org/presentationml/2006/main" xmlns:r="http://schemas.openxmlformats.org/officeDocument/2006/relationships">
   <p:cSld>
     <p:bg>
